--- a/Slides/PuG_2026_NPoP_Strobel_2026-06-05.pptx
+++ b/Slides/PuG_2026_NPoP_Strobel_2026-06-05.pptx
@@ -7194,7 +7194,7 @@
                 <a:ea typeface="Open Sans" panose="020B0606030504020204" pitchFamily="34" charset="0"/>
                 <a:cs typeface="Open Sans" panose="020B0606030504020204" pitchFamily="34" charset="0"/>
               </a:rPr>
-              <a:t> ~ .20-.30.</a:t>
+              <a:t> ~ .10-.30.</a:t>
             </a:r>
           </a:p>
           <a:p>

--- a/Slides/PuG_2026_NPoP_Strobel_2026-06-05.pptx
+++ b/Slides/PuG_2026_NPoP_Strobel_2026-06-05.pptx
@@ -8990,7 +8990,7 @@
             </a:pPr>
             <a:r>
               <a:rPr lang="en-US" noProof="1"/>
-              <a:t>the observed correlation between two variables is weaker than their "true" relationship due to unreliability in the data or </a:t>
+              <a:t>the observed correlation between two variables is weaker than their "true" relationship due to unreliability in the data and/or </a:t>
             </a:r>
             <a:r>
               <a:rPr lang="en-US" sz="1800" noProof="1"/>

--- a/Slides/PuG_2026_NPoP_Strobel_2026-06-05.pptx
+++ b/Slides/PuG_2026_NPoP_Strobel_2026-06-05.pptx
@@ -218,7 +218,7 @@
           <a:p>
             <a:fld id="{C6AC6211-610F-44E5-BF19-D3CDF6EDD281}" type="datetimeFigureOut">
               <a:rPr lang="de-DE" smtClean="0"/>
-              <a:t>28.05.26</a:t>
+              <a:t>03.06.26</a:t>
             </a:fld>
             <a:endParaRPr lang="de-DE"/>
           </a:p>
@@ -384,7 +384,7 @@
           <a:p>
             <a:fld id="{347435D3-23A6-45D3-8DFA-7317DC1E7A64}" type="datetimeFigureOut">
               <a:rPr lang="de-DE" smtClean="0"/>
-              <a:t>28.05.26</a:t>
+              <a:t>02.06.26</a:t>
             </a:fld>
             <a:endParaRPr lang="de-DE"/>
           </a:p>
@@ -4391,22 +4391,14 @@
           <p:nvPr/>
         </p:nvPicPr>
         <p:blipFill>
-          <a:blip r:embed="rId4">
-            <a:duotone>
-              <a:schemeClr val="accent2">
-                <a:shade val="45000"/>
-                <a:satMod val="135000"/>
-              </a:schemeClr>
-              <a:prstClr val="white"/>
-            </a:duotone>
-          </a:blip>
+          <a:blip r:embed="rId4"/>
           <a:stretch>
             <a:fillRect/>
           </a:stretch>
         </p:blipFill>
         <p:spPr>
           <a:xfrm>
-            <a:off x="7065939" y="1484313"/>
+            <a:off x="7136886" y="1484313"/>
             <a:ext cx="4389461" cy="3164247"/>
           </a:xfrm>
           <a:prstGeom prst="rect">
@@ -4481,7 +4473,7 @@
                 <a:ea typeface="Open Sans" panose="020B0606030504020204" pitchFamily="34" charset="0"/>
                 <a:cs typeface="Open Sans" panose="020B0606030504020204" pitchFamily="34" charset="0"/>
               </a:rPr>
-              <a:t>116 university students, high NFC individuals showed the expected pattern of subjective values over </a:t>
+              <a:t>116 university students, high vs. low NFC individuals showing expected patterns of subjective values over </a:t>
             </a:r>
             <a:r>
               <a:rPr lang="en-US" sz="1600" i="1" noProof="1">
@@ -4506,6 +4498,279 @@
             <a:endParaRPr lang="en-US" sz="1600" noProof="1">
               <a:solidFill>
                 <a:schemeClr val="accent2"/>
+              </a:solidFill>
+            </a:endParaRPr>
+          </a:p>
+        </p:txBody>
+      </p:sp>
+      <p:sp>
+        <p:nvSpPr>
+          <p:cNvPr id="5" name="Textfeld 4">
+            <a:extLst>
+              <a:ext uri="{FF2B5EF4-FFF2-40B4-BE49-F238E27FC236}">
+                <a16:creationId xmlns:a16="http://schemas.microsoft.com/office/drawing/2014/main" id="{16C40FE6-D131-80BA-E048-1E13B5660401}"/>
+              </a:ext>
+            </a:extLst>
+          </p:cNvPr>
+          <p:cNvSpPr txBox="1"/>
+          <p:nvPr/>
+        </p:nvSpPr>
+        <p:spPr>
+          <a:xfrm rot="16200000">
+            <a:off x="6508532" y="2835808"/>
+            <a:ext cx="1346972" cy="184666"/>
+          </a:xfrm>
+          <a:prstGeom prst="rect">
+            <a:avLst/>
+          </a:prstGeom>
+          <a:solidFill>
+            <a:schemeClr val="bg1"/>
+          </a:solidFill>
+        </p:spPr>
+        <p:txBody>
+          <a:bodyPr wrap="none" tIns="0" bIns="0" rtlCol="0">
+            <a:spAutoFit/>
+          </a:bodyPr>
+          <a:lstStyle/>
+          <a:p>
+            <a:r>
+              <a:rPr lang="de-DE" sz="1200" dirty="0" err="1">
+                <a:solidFill>
+                  <a:schemeClr val="accent2">
+                    <a:lumMod val="50000"/>
+                  </a:schemeClr>
+                </a:solidFill>
+              </a:rPr>
+              <a:t>Subjective</a:t>
+            </a:r>
+            <a:r>
+              <a:rPr lang="de-DE" sz="1200" dirty="0">
+                <a:solidFill>
+                  <a:schemeClr val="accent2">
+                    <a:lumMod val="50000"/>
+                  </a:schemeClr>
+                </a:solidFill>
+              </a:rPr>
+              <a:t> Value</a:t>
+            </a:r>
+            <a:endParaRPr lang="de-DE" dirty="0">
+              <a:solidFill>
+                <a:schemeClr val="accent2">
+                  <a:lumMod val="50000"/>
+                </a:schemeClr>
+              </a:solidFill>
+            </a:endParaRPr>
+          </a:p>
+        </p:txBody>
+      </p:sp>
+      <p:sp>
+        <p:nvSpPr>
+          <p:cNvPr id="6" name="Textfeld 5">
+            <a:extLst>
+              <a:ext uri="{FF2B5EF4-FFF2-40B4-BE49-F238E27FC236}">
+                <a16:creationId xmlns:a16="http://schemas.microsoft.com/office/drawing/2014/main" id="{2A1F8AD8-61BF-350E-0882-99FC3DED1593}"/>
+              </a:ext>
+            </a:extLst>
+          </p:cNvPr>
+          <p:cNvSpPr txBox="1"/>
+          <p:nvPr/>
+        </p:nvSpPr>
+        <p:spPr>
+          <a:xfrm>
+            <a:off x="8535106" y="4459671"/>
+            <a:ext cx="1088888" cy="276999"/>
+          </a:xfrm>
+          <a:prstGeom prst="rect">
+            <a:avLst/>
+          </a:prstGeom>
+          <a:solidFill>
+            <a:schemeClr val="bg1"/>
+          </a:solidFill>
+        </p:spPr>
+        <p:txBody>
+          <a:bodyPr wrap="none" rtlCol="0">
+            <a:spAutoFit/>
+          </a:bodyPr>
+          <a:lstStyle/>
+          <a:p>
+            <a:r>
+              <a:rPr lang="de-DE" sz="1200" i="1" dirty="0" err="1">
+                <a:solidFill>
+                  <a:schemeClr val="accent2">
+                    <a:lumMod val="50000"/>
+                  </a:schemeClr>
+                </a:solidFill>
+              </a:rPr>
+              <a:t>n</a:t>
+            </a:r>
+            <a:r>
+              <a:rPr lang="de-DE" sz="1200" dirty="0">
+                <a:solidFill>
+                  <a:schemeClr val="accent2">
+                    <a:lumMod val="50000"/>
+                  </a:schemeClr>
+                </a:solidFill>
+              </a:rPr>
+              <a:t>-back Level</a:t>
+            </a:r>
+            <a:endParaRPr lang="de-DE" dirty="0">
+              <a:solidFill>
+                <a:schemeClr val="accent2">
+                  <a:lumMod val="50000"/>
+                </a:schemeClr>
+              </a:solidFill>
+            </a:endParaRPr>
+          </a:p>
+        </p:txBody>
+      </p:sp>
+      <p:sp>
+        <p:nvSpPr>
+          <p:cNvPr id="9" name="Textfeld 8">
+            <a:extLst>
+              <a:ext uri="{FF2B5EF4-FFF2-40B4-BE49-F238E27FC236}">
+                <a16:creationId xmlns:a16="http://schemas.microsoft.com/office/drawing/2014/main" id="{A054058A-9160-04D4-BD47-FFDD586FC995}"/>
+              </a:ext>
+            </a:extLst>
+          </p:cNvPr>
+          <p:cNvSpPr txBox="1"/>
+          <p:nvPr/>
+        </p:nvSpPr>
+        <p:spPr>
+          <a:xfrm>
+            <a:off x="10667075" y="2626130"/>
+            <a:ext cx="859906" cy="184666"/>
+          </a:xfrm>
+          <a:prstGeom prst="rect">
+            <a:avLst/>
+          </a:prstGeom>
+          <a:solidFill>
+            <a:schemeClr val="bg1"/>
+          </a:solidFill>
+        </p:spPr>
+        <p:txBody>
+          <a:bodyPr wrap="none" lIns="36000" tIns="0" rIns="36000" bIns="0" rtlCol="0">
+            <a:spAutoFit/>
+          </a:bodyPr>
+          <a:lstStyle/>
+          <a:p>
+            <a:pPr algn="ctr"/>
+            <a:r>
+              <a:rPr lang="de-DE" sz="1200" dirty="0">
+                <a:solidFill>
+                  <a:schemeClr val="accent2">
+                    <a:lumMod val="50000"/>
+                  </a:schemeClr>
+                </a:solidFill>
+              </a:rPr>
+              <a:t>NFC Group</a:t>
+            </a:r>
+            <a:endParaRPr lang="de-DE" dirty="0">
+              <a:solidFill>
+                <a:schemeClr val="accent2">
+                  <a:lumMod val="50000"/>
+                </a:schemeClr>
+              </a:solidFill>
+            </a:endParaRPr>
+          </a:p>
+        </p:txBody>
+      </p:sp>
+      <p:sp>
+        <p:nvSpPr>
+          <p:cNvPr id="10" name="Textfeld 9">
+            <a:extLst>
+              <a:ext uri="{FF2B5EF4-FFF2-40B4-BE49-F238E27FC236}">
+                <a16:creationId xmlns:a16="http://schemas.microsoft.com/office/drawing/2014/main" id="{70125C83-C1B2-1F14-FB96-AEBA22739F9A}"/>
+              </a:ext>
+            </a:extLst>
+          </p:cNvPr>
+          <p:cNvSpPr txBox="1"/>
+          <p:nvPr/>
+        </p:nvSpPr>
+        <p:spPr>
+          <a:xfrm>
+            <a:off x="10938277" y="2838497"/>
+            <a:ext cx="927104" cy="153888"/>
+          </a:xfrm>
+          <a:prstGeom prst="rect">
+            <a:avLst/>
+          </a:prstGeom>
+          <a:solidFill>
+            <a:schemeClr val="bg1"/>
+          </a:solidFill>
+        </p:spPr>
+        <p:txBody>
+          <a:bodyPr wrap="none" lIns="36000" tIns="0" rIns="36000" bIns="0" rtlCol="0">
+            <a:spAutoFit/>
+          </a:bodyPr>
+          <a:lstStyle/>
+          <a:p>
+            <a:pPr algn="ctr"/>
+            <a:r>
+              <a:rPr lang="de-DE" sz="1000" dirty="0">
+                <a:solidFill>
+                  <a:schemeClr val="accent2">
+                    <a:lumMod val="50000"/>
+                  </a:schemeClr>
+                </a:solidFill>
+              </a:rPr>
+              <a:t>Above Median</a:t>
+            </a:r>
+            <a:endParaRPr lang="de-DE" dirty="0">
+              <a:solidFill>
+                <a:schemeClr val="accent2">
+                  <a:lumMod val="50000"/>
+                </a:schemeClr>
+              </a:solidFill>
+            </a:endParaRPr>
+          </a:p>
+        </p:txBody>
+      </p:sp>
+      <p:sp>
+        <p:nvSpPr>
+          <p:cNvPr id="11" name="Textfeld 10">
+            <a:extLst>
+              <a:ext uri="{FF2B5EF4-FFF2-40B4-BE49-F238E27FC236}">
+                <a16:creationId xmlns:a16="http://schemas.microsoft.com/office/drawing/2014/main" id="{5F19B2FB-4E53-2D1B-E157-3F70720B0229}"/>
+              </a:ext>
+            </a:extLst>
+          </p:cNvPr>
+          <p:cNvSpPr txBox="1"/>
+          <p:nvPr/>
+        </p:nvSpPr>
+        <p:spPr>
+          <a:xfrm>
+            <a:off x="10943490" y="2999583"/>
+            <a:ext cx="917486" cy="153888"/>
+          </a:xfrm>
+          <a:prstGeom prst="rect">
+            <a:avLst/>
+          </a:prstGeom>
+          <a:solidFill>
+            <a:schemeClr val="bg1"/>
+          </a:solidFill>
+        </p:spPr>
+        <p:txBody>
+          <a:bodyPr wrap="none" lIns="36000" tIns="0" rIns="36000" bIns="0" rtlCol="0">
+            <a:spAutoFit/>
+          </a:bodyPr>
+          <a:lstStyle/>
+          <a:p>
+            <a:pPr algn="ctr"/>
+            <a:r>
+              <a:rPr lang="de-DE" sz="1000" dirty="0">
+                <a:solidFill>
+                  <a:schemeClr val="accent2">
+                    <a:lumMod val="50000"/>
+                  </a:schemeClr>
+                </a:solidFill>
+              </a:rPr>
+              <a:t>Below Median</a:t>
+            </a:r>
+            <a:endParaRPr lang="de-DE" dirty="0">
+              <a:solidFill>
+                <a:schemeClr val="accent2">
+                  <a:lumMod val="50000"/>
+                </a:schemeClr>
               </a:solidFill>
             </a:endParaRPr>
           </a:p>
@@ -4524,13 +4789,13 @@
   <p:clrMapOvr>
     <a:masterClrMapping/>
   </p:clrMapOvr>
-  <mc:AlternateContent xmlns:mc="http://schemas.openxmlformats.org/markup-compatibility/2006">
-    <mc:Choice xmlns:p14="http://schemas.microsoft.com/office/powerpoint/2010/main" Requires="p14">
+  <mc:AlternateContent xmlns:mc="http://schemas.openxmlformats.org/markup-compatibility/2006" xmlns:p14="http://schemas.microsoft.com/office/powerpoint/2010/main">
+    <mc:Choice Requires="p14">
       <p:transition spd="med" p14:dur="700">
         <p:fade/>
       </p:transition>
     </mc:Choice>
-    <mc:Fallback>
+    <mc:Fallback xmlns="">
       <p:transition spd="med">
         <p:fade/>
       </p:transition>
@@ -5063,7 +5328,7 @@
             <a:avLst/>
           </a:prstGeom>
           <a:solidFill>
-            <a:srgbClr val="C00000">
+            <a:srgbClr val="F07D00">
               <a:alpha val="20000"/>
             </a:srgbClr>
           </a:solidFill>
@@ -5113,13 +5378,13 @@
   <p:clrMapOvr>
     <a:masterClrMapping/>
   </p:clrMapOvr>
-  <mc:AlternateContent xmlns:mc="http://schemas.openxmlformats.org/markup-compatibility/2006">
-    <mc:Choice xmlns:p14="http://schemas.microsoft.com/office/powerpoint/2010/main" Requires="p14">
+  <mc:AlternateContent xmlns:mc="http://schemas.openxmlformats.org/markup-compatibility/2006" xmlns:p14="http://schemas.microsoft.com/office/powerpoint/2010/main">
+    <mc:Choice Requires="p14">
       <p:transition spd="med" p14:dur="700">
         <p:fade/>
       </p:transition>
     </mc:Choice>
-    <mc:Fallback>
+    <mc:Fallback xmlns="">
       <p:transition spd="med">
         <p:fade/>
       </p:transition>
@@ -5713,13 +5978,13 @@
   <p:clrMapOvr>
     <a:masterClrMapping/>
   </p:clrMapOvr>
-  <mc:AlternateContent xmlns:mc="http://schemas.openxmlformats.org/markup-compatibility/2006">
-    <mc:Choice xmlns:p14="http://schemas.microsoft.com/office/powerpoint/2010/main" Requires="p14">
+  <mc:AlternateContent xmlns:mc="http://schemas.openxmlformats.org/markup-compatibility/2006" xmlns:p14="http://schemas.microsoft.com/office/powerpoint/2010/main">
+    <mc:Choice Requires="p14">
       <p:transition spd="med" p14:dur="700">
         <p:fade/>
       </p:transition>
     </mc:Choice>
-    <mc:Fallback>
+    <mc:Fallback xmlns="">
       <p:transition spd="med">
         <p:fade/>
       </p:transition>
@@ -7003,6 +7268,107 @@
           </a:prstGeom>
         </p:spPr>
       </p:pic>
+      <p:cxnSp>
+        <p:nvCxnSpPr>
+          <p:cNvPr id="4" name="Gerade Verbindung mit Pfeil 3">
+            <a:extLst>
+              <a:ext uri="{FF2B5EF4-FFF2-40B4-BE49-F238E27FC236}">
+                <a16:creationId xmlns:a16="http://schemas.microsoft.com/office/drawing/2014/main" id="{8D90E96A-5D1F-C1A6-5BF5-AECF1DADCDDD}"/>
+              </a:ext>
+            </a:extLst>
+          </p:cNvPr>
+          <p:cNvCxnSpPr>
+            <a:cxnSpLocks/>
+            <a:stCxn id="8" idx="2"/>
+            <a:endCxn id="6" idx="3"/>
+          </p:cNvCxnSpPr>
+          <p:nvPr/>
+        </p:nvCxnSpPr>
+        <p:spPr>
+          <a:xfrm rot="5400000">
+            <a:off x="8319666" y="5164371"/>
+            <a:ext cx="1798686" cy="1128045"/>
+          </a:xfrm>
+          <a:prstGeom prst="bentConnector2">
+            <a:avLst/>
+          </a:prstGeom>
+          <a:ln w="12700">
+            <a:solidFill>
+              <a:schemeClr val="accent2"/>
+            </a:solidFill>
+            <a:headEnd type="triangle"/>
+            <a:tailEnd type="none"/>
+          </a:ln>
+        </p:spPr>
+        <p:style>
+          <a:lnRef idx="1">
+            <a:schemeClr val="accent1"/>
+          </a:lnRef>
+          <a:fillRef idx="0">
+            <a:schemeClr val="accent1"/>
+          </a:fillRef>
+          <a:effectRef idx="0">
+            <a:schemeClr val="accent1"/>
+          </a:effectRef>
+          <a:fontRef idx="minor">
+            <a:schemeClr val="tx1"/>
+          </a:fontRef>
+        </p:style>
+      </p:cxnSp>
+      <p:sp>
+        <p:nvSpPr>
+          <p:cNvPr id="6" name="Abgerundetes Rechteck 5">
+            <a:extLst>
+              <a:ext uri="{FF2B5EF4-FFF2-40B4-BE49-F238E27FC236}">
+                <a16:creationId xmlns:a16="http://schemas.microsoft.com/office/drawing/2014/main" id="{A56BD6A2-9A8A-3DA6-686A-FA6535802D5A}"/>
+              </a:ext>
+            </a:extLst>
+          </p:cNvPr>
+          <p:cNvSpPr/>
+          <p:nvPr/>
+        </p:nvSpPr>
+        <p:spPr>
+          <a:xfrm>
+            <a:off x="8473428" y="6538526"/>
+            <a:ext cx="181558" cy="178420"/>
+          </a:xfrm>
+          <a:prstGeom prst="roundRect">
+            <a:avLst/>
+          </a:prstGeom>
+          <a:noFill/>
+          <a:ln>
+            <a:noFill/>
+          </a:ln>
+        </p:spPr>
+        <p:style>
+          <a:lnRef idx="2">
+            <a:schemeClr val="accent1">
+              <a:shade val="50000"/>
+            </a:schemeClr>
+          </a:lnRef>
+          <a:fillRef idx="1">
+            <a:schemeClr val="accent1"/>
+          </a:fillRef>
+          <a:effectRef idx="0">
+            <a:schemeClr val="accent1"/>
+          </a:effectRef>
+          <a:fontRef idx="minor">
+            <a:schemeClr val="lt1"/>
+          </a:fontRef>
+        </p:style>
+        <p:txBody>
+          <a:bodyPr rtlCol="0" anchor="ctr"/>
+          <a:lstStyle/>
+          <a:p>
+            <a:pPr algn="ctr"/>
+            <a:endParaRPr lang="de-DE" sz="1600" dirty="0">
+              <a:solidFill>
+                <a:schemeClr val="accent2"/>
+              </a:solidFill>
+            </a:endParaRPr>
+          </a:p>
+        </p:txBody>
+      </p:sp>
     </p:spTree>
     <p:custDataLst>
       <p:tags r:id="rId1"/>
@@ -8468,13 +8834,13 @@
   <p:clrMapOvr>
     <a:masterClrMapping/>
   </p:clrMapOvr>
-  <mc:AlternateContent xmlns:mc="http://schemas.openxmlformats.org/markup-compatibility/2006">
-    <mc:Choice xmlns:p14="http://schemas.microsoft.com/office/powerpoint/2010/main" Requires="p14">
+  <mc:AlternateContent xmlns:mc="http://schemas.openxmlformats.org/markup-compatibility/2006" xmlns:p14="http://schemas.microsoft.com/office/powerpoint/2010/main">
+    <mc:Choice Requires="p14">
       <p:transition spd="med" p14:dur="700">
         <p:fade/>
       </p:transition>
     </mc:Choice>
-    <mc:Fallback>
+    <mc:Fallback xmlns="">
       <p:transition spd="med">
         <p:fade/>
       </p:transition>
@@ -8990,13 +9356,9 @@
             </a:pPr>
             <a:r>
               <a:rPr lang="en-US" noProof="1"/>
-              <a:t>the observed correlation between two variables is weaker than their "true" relationship due to unreliability in the data and/or </a:t>
-            </a:r>
-            <a:r>
-              <a:rPr lang="en-US" sz="1800" noProof="1"/>
-              <a:t>measurement error</a:t>
-            </a:r>
-            <a:endParaRPr lang="en-US" sz="1800" noProof="1">
+              <a:t>the observed correlation between two variables is weaker than their "true" relationship due to unreliability in the data and/or measurement error</a:t>
+            </a:r>
+            <a:endParaRPr lang="en-US" noProof="1">
               <a:ea typeface="Open Sans" panose="020B0606030504020204" pitchFamily="34" charset="0"/>
               <a:cs typeface="Open Sans" panose="020B0606030504020204" pitchFamily="34" charset="0"/>
             </a:endParaRPr>
@@ -9140,135 +9502,137 @@
                 <a:ea typeface="Open Sans" panose="020B0606030504020204" pitchFamily="34" charset="0"/>
                 <a:cs typeface="Open Sans" panose="020B0606030504020204" pitchFamily="34" charset="0"/>
               </a:rPr>
-              <a:t> for attenuation via </a:t>
-            </a:r>
-            <a:r>
-              <a:rPr lang="en-US" i="1" noProof="1">
+              <a:t> for attenuation: </a:t>
+            </a:r>
+            <a:r>
+              <a:rPr lang="en-US" b="1" i="1" noProof="1">
                 <a:solidFill>
                   <a:schemeClr val="accent2"/>
                 </a:solidFill>
-                <a:ea typeface="Open Sans" panose="020B0606030504020204" pitchFamily="34" charset="0"/>
-                <a:cs typeface="Open Sans" panose="020B0606030504020204" pitchFamily="34" charset="0"/>
+                <a:latin typeface="Open Sans SemiBold" panose="020B0606030504020204" pitchFamily="34" charset="0"/>
+                <a:ea typeface="Open Sans SemiBold" panose="020B0606030504020204" pitchFamily="34" charset="0"/>
+                <a:cs typeface="Open Sans SemiBold" panose="020B0606030504020204" pitchFamily="34" charset="0"/>
               </a:rPr>
               <a:t>r</a:t>
             </a:r>
             <a:r>
-              <a:rPr lang="en-US" i="1" baseline="-25000" noProof="1">
+              <a:rPr lang="en-US" b="1" baseline="-25000" noProof="1">
                 <a:solidFill>
                   <a:schemeClr val="accent2"/>
                 </a:solidFill>
-                <a:ea typeface="Open Sans" panose="020B0606030504020204" pitchFamily="34" charset="0"/>
-                <a:cs typeface="Open Sans" panose="020B0606030504020204" pitchFamily="34" charset="0"/>
+                <a:latin typeface="Open Sans SemiBold" panose="020B0606030504020204" pitchFamily="34" charset="0"/>
+                <a:ea typeface="Open Sans SemiBold" panose="020B0606030504020204" pitchFamily="34" charset="0"/>
+                <a:cs typeface="Open Sans SemiBold" panose="020B0606030504020204" pitchFamily="34" charset="0"/>
               </a:rPr>
               <a:t>true</a:t>
             </a:r>
             <a:r>
-              <a:rPr lang="en-US" noProof="1">
+              <a:rPr lang="en-US" b="1" noProof="1">
                 <a:solidFill>
                   <a:schemeClr val="accent2"/>
                 </a:solidFill>
-                <a:ea typeface="Open Sans" panose="020B0606030504020204" pitchFamily="34" charset="0"/>
-                <a:cs typeface="Open Sans" panose="020B0606030504020204" pitchFamily="34" charset="0"/>
+                <a:latin typeface="Open Sans SemiBold" panose="020B0606030504020204" pitchFamily="34" charset="0"/>
+                <a:ea typeface="Open Sans SemiBold" panose="020B0606030504020204" pitchFamily="34" charset="0"/>
+                <a:cs typeface="Open Sans SemiBold" panose="020B0606030504020204" pitchFamily="34" charset="0"/>
               </a:rPr>
               <a:t> = </a:t>
             </a:r>
             <a:r>
-              <a:rPr lang="en-US" i="1" noProof="1">
+              <a:rPr lang="en-US" b="1" i="1" noProof="1">
                 <a:solidFill>
                   <a:schemeClr val="accent2"/>
                 </a:solidFill>
-                <a:ea typeface="Open Sans" panose="020B0606030504020204" pitchFamily="34" charset="0"/>
-                <a:cs typeface="Open Sans" panose="020B0606030504020204" pitchFamily="34" charset="0"/>
+                <a:latin typeface="Open Sans SemiBold" panose="020B0606030504020204" pitchFamily="34" charset="0"/>
+                <a:ea typeface="Open Sans SemiBold" panose="020B0606030504020204" pitchFamily="34" charset="0"/>
+                <a:cs typeface="Open Sans SemiBold" panose="020B0606030504020204" pitchFamily="34" charset="0"/>
               </a:rPr>
               <a:t>r</a:t>
             </a:r>
             <a:r>
-              <a:rPr lang="en-US" i="1" baseline="-25000" noProof="1">
+              <a:rPr lang="en-US" b="1" baseline="-25000" noProof="1">
                 <a:solidFill>
                   <a:schemeClr val="accent2"/>
                 </a:solidFill>
-                <a:ea typeface="Open Sans" panose="020B0606030504020204" pitchFamily="34" charset="0"/>
-                <a:cs typeface="Open Sans" panose="020B0606030504020204" pitchFamily="34" charset="0"/>
+                <a:latin typeface="Open Sans SemiBold" panose="020B0606030504020204" pitchFamily="34" charset="0"/>
+                <a:ea typeface="Open Sans SemiBold" panose="020B0606030504020204" pitchFamily="34" charset="0"/>
+                <a:cs typeface="Open Sans SemiBold" panose="020B0606030504020204" pitchFamily="34" charset="0"/>
               </a:rPr>
               <a:t>obs</a:t>
             </a:r>
             <a:r>
-              <a:rPr lang="en-US" noProof="1">
+              <a:rPr lang="en-US" b="1" noProof="1">
                 <a:solidFill>
                   <a:schemeClr val="accent2"/>
                 </a:solidFill>
-                <a:ea typeface="Open Sans" panose="020B0606030504020204" pitchFamily="34" charset="0"/>
-                <a:cs typeface="Open Sans" panose="020B0606030504020204" pitchFamily="34" charset="0"/>
+                <a:latin typeface="Open Sans SemiBold" panose="020B0606030504020204" pitchFamily="34" charset="0"/>
+                <a:ea typeface="Open Sans SemiBold" panose="020B0606030504020204" pitchFamily="34" charset="0"/>
+                <a:cs typeface="Open Sans SemiBold" panose="020B0606030504020204" pitchFamily="34" charset="0"/>
               </a:rPr>
               <a:t>/sqrt(</a:t>
             </a:r>
             <a:r>
-              <a:rPr lang="en-US" i="1" noProof="1">
+              <a:rPr lang="en-US" b="1" i="1" noProof="1">
                 <a:solidFill>
                   <a:schemeClr val="accent2"/>
                 </a:solidFill>
-                <a:ea typeface="Open Sans" panose="020B0606030504020204" pitchFamily="34" charset="0"/>
-                <a:cs typeface="Open Sans" panose="020B0606030504020204" pitchFamily="34" charset="0"/>
+                <a:latin typeface="Open Sans SemiBold" panose="020B0606030504020204" pitchFamily="34" charset="0"/>
+                <a:ea typeface="Open Sans SemiBold" panose="020B0606030504020204" pitchFamily="34" charset="0"/>
+                <a:cs typeface="Open Sans SemiBold" panose="020B0606030504020204" pitchFamily="34" charset="0"/>
               </a:rPr>
               <a:t>Rel</a:t>
             </a:r>
             <a:r>
-              <a:rPr lang="en-US" i="1" baseline="-25000" noProof="1">
+              <a:rPr lang="en-US" b="1" baseline="-25000" noProof="1">
                 <a:solidFill>
                   <a:schemeClr val="accent2"/>
                 </a:solidFill>
-                <a:ea typeface="Open Sans" panose="020B0606030504020204" pitchFamily="34" charset="0"/>
-                <a:cs typeface="Open Sans" panose="020B0606030504020204" pitchFamily="34" charset="0"/>
-              </a:rPr>
-              <a:t>X</a:t>
-            </a:r>
-            <a:r>
-              <a:rPr lang="en-US" baseline="-25000" noProof="1">
+                <a:latin typeface="Open Sans SemiBold" panose="020B0606030504020204" pitchFamily="34" charset="0"/>
+                <a:ea typeface="Open Sans SemiBold" panose="020B0606030504020204" pitchFamily="34" charset="0"/>
+                <a:cs typeface="Open Sans SemiBold" panose="020B0606030504020204" pitchFamily="34" charset="0"/>
+              </a:rPr>
+              <a:t>X </a:t>
+            </a:r>
+            <a:r>
+              <a:rPr lang="en-US" b="1" noProof="1">
                 <a:solidFill>
                   <a:schemeClr val="accent2"/>
                 </a:solidFill>
-                <a:ea typeface="Open Sans" panose="020B0606030504020204" pitchFamily="34" charset="0"/>
-                <a:cs typeface="Open Sans" panose="020B0606030504020204" pitchFamily="34" charset="0"/>
-              </a:rPr>
-              <a:t> </a:t>
-            </a:r>
-            <a:r>
-              <a:rPr lang="en-US" noProof="1">
+                <a:latin typeface="Open Sans SemiBold" panose="020B0606030504020204" pitchFamily="34" charset="0"/>
+                <a:ea typeface="Open Sans SemiBold" panose="020B0606030504020204" pitchFamily="34" charset="0"/>
+                <a:cs typeface="Open Sans SemiBold" panose="020B0606030504020204" pitchFamily="34" charset="0"/>
+              </a:rPr>
+              <a:t>* </a:t>
+            </a:r>
+            <a:r>
+              <a:rPr lang="en-US" b="1" i="1" noProof="1">
                 <a:solidFill>
                   <a:schemeClr val="accent2"/>
                 </a:solidFill>
-                <a:ea typeface="Open Sans" panose="020B0606030504020204" pitchFamily="34" charset="0"/>
-                <a:cs typeface="Open Sans" panose="020B0606030504020204" pitchFamily="34" charset="0"/>
-              </a:rPr>
-              <a:t>* </a:t>
-            </a:r>
-            <a:r>
-              <a:rPr lang="en-US" i="1" noProof="1">
+                <a:latin typeface="Open Sans SemiBold" panose="020B0606030504020204" pitchFamily="34" charset="0"/>
+                <a:ea typeface="Open Sans SemiBold" panose="020B0606030504020204" pitchFamily="34" charset="0"/>
+                <a:cs typeface="Open Sans SemiBold" panose="020B0606030504020204" pitchFamily="34" charset="0"/>
+              </a:rPr>
+              <a:t>Rel</a:t>
+            </a:r>
+            <a:r>
+              <a:rPr lang="en-US" b="1" baseline="-25000" noProof="1">
                 <a:solidFill>
                   <a:schemeClr val="accent2"/>
                 </a:solidFill>
-                <a:ea typeface="Open Sans" panose="020B0606030504020204" pitchFamily="34" charset="0"/>
-                <a:cs typeface="Open Sans" panose="020B0606030504020204" pitchFamily="34" charset="0"/>
-              </a:rPr>
-              <a:t>Rel</a:t>
-            </a:r>
-            <a:r>
-              <a:rPr lang="en-US" i="1" baseline="-25000" noProof="1">
+                <a:latin typeface="Open Sans SemiBold" panose="020B0606030504020204" pitchFamily="34" charset="0"/>
+                <a:ea typeface="Open Sans SemiBold" panose="020B0606030504020204" pitchFamily="34" charset="0"/>
+                <a:cs typeface="Open Sans SemiBold" panose="020B0606030504020204" pitchFamily="34" charset="0"/>
+              </a:rPr>
+              <a:t>Y</a:t>
+            </a:r>
+            <a:r>
+              <a:rPr lang="en-US" b="1" noProof="1">
                 <a:solidFill>
                   <a:schemeClr val="accent2"/>
                 </a:solidFill>
-                <a:ea typeface="Open Sans" panose="020B0606030504020204" pitchFamily="34" charset="0"/>
-                <a:cs typeface="Open Sans" panose="020B0606030504020204" pitchFamily="34" charset="0"/>
-              </a:rPr>
-              <a:t>Y</a:t>
-            </a:r>
-            <a:r>
-              <a:rPr lang="en-US" noProof="1">
-                <a:solidFill>
-                  <a:schemeClr val="accent2"/>
-                </a:solidFill>
-                <a:ea typeface="Open Sans" panose="020B0606030504020204" pitchFamily="34" charset="0"/>
-                <a:cs typeface="Open Sans" panose="020B0606030504020204" pitchFamily="34" charset="0"/>
+                <a:latin typeface="Open Sans SemiBold" panose="020B0606030504020204" pitchFamily="34" charset="0"/>
+                <a:ea typeface="Open Sans SemiBold" panose="020B0606030504020204" pitchFamily="34" charset="0"/>
+                <a:cs typeface="Open Sans SemiBold" panose="020B0606030504020204" pitchFamily="34" charset="0"/>
               </a:rPr>
               <a:t>)</a:t>
             </a:r>
@@ -9584,7 +9948,7 @@
         </p:nvSpPr>
         <p:spPr>
           <a:xfrm rot="16200000">
-            <a:off x="10229663" y="3305888"/>
+            <a:off x="10229663" y="3481206"/>
             <a:ext cx="2854036" cy="246221"/>
           </a:xfrm>
           <a:prstGeom prst="rect">
@@ -9881,6 +10245,604 @@
           </a:p>
         </p:txBody>
       </p:sp>
+      <p:sp>
+        <p:nvSpPr>
+          <p:cNvPr id="2" name="Textfeld 1">
+            <a:extLst>
+              <a:ext uri="{FF2B5EF4-FFF2-40B4-BE49-F238E27FC236}">
+                <a16:creationId xmlns:a16="http://schemas.microsoft.com/office/drawing/2014/main" id="{4B5DF65B-072A-0D95-C33D-B6C3864EC951}"/>
+              </a:ext>
+            </a:extLst>
+          </p:cNvPr>
+          <p:cNvSpPr txBox="1"/>
+          <p:nvPr/>
+        </p:nvSpPr>
+        <p:spPr>
+          <a:xfrm>
+            <a:off x="7437120" y="1172235"/>
+            <a:ext cx="1180452" cy="307777"/>
+          </a:xfrm>
+          <a:prstGeom prst="rect">
+            <a:avLst/>
+          </a:prstGeom>
+          <a:solidFill>
+            <a:schemeClr val="bg1"/>
+          </a:solidFill>
+        </p:spPr>
+        <p:txBody>
+          <a:bodyPr wrap="none" rtlCol="0">
+            <a:spAutoFit/>
+          </a:bodyPr>
+          <a:lstStyle/>
+          <a:p>
+            <a:pPr algn="ctr"/>
+            <a:r>
+              <a:rPr lang="de-DE" sz="1400" b="1" dirty="0">
+                <a:latin typeface="Open Sans SemiBold" panose="020B0606030504020204" pitchFamily="34" charset="0"/>
+                <a:ea typeface="Open Sans SemiBold" panose="020B0606030504020204" pitchFamily="34" charset="0"/>
+                <a:cs typeface="Open Sans SemiBold" panose="020B0606030504020204" pitchFamily="34" charset="0"/>
+              </a:rPr>
+              <a:t>True Scores</a:t>
+            </a:r>
+            <a:endParaRPr lang="de-DE" b="1" dirty="0">
+              <a:latin typeface="Open Sans SemiBold" panose="020B0606030504020204" pitchFamily="34" charset="0"/>
+              <a:ea typeface="Open Sans SemiBold" panose="020B0606030504020204" pitchFamily="34" charset="0"/>
+              <a:cs typeface="Open Sans SemiBold" panose="020B0606030504020204" pitchFamily="34" charset="0"/>
+            </a:endParaRPr>
+          </a:p>
+        </p:txBody>
+      </p:sp>
+      <p:sp>
+        <p:nvSpPr>
+          <p:cNvPr id="4" name="Textfeld 3">
+            <a:extLst>
+              <a:ext uri="{FF2B5EF4-FFF2-40B4-BE49-F238E27FC236}">
+                <a16:creationId xmlns:a16="http://schemas.microsoft.com/office/drawing/2014/main" id="{870E03DF-4638-AE42-058C-F8FF578B9FCE}"/>
+              </a:ext>
+            </a:extLst>
+          </p:cNvPr>
+          <p:cNvSpPr txBox="1"/>
+          <p:nvPr/>
+        </p:nvSpPr>
+        <p:spPr>
+          <a:xfrm>
+            <a:off x="9012519" y="1172235"/>
+            <a:ext cx="904415" cy="307777"/>
+          </a:xfrm>
+          <a:prstGeom prst="rect">
+            <a:avLst/>
+          </a:prstGeom>
+          <a:solidFill>
+            <a:schemeClr val="bg1"/>
+          </a:solidFill>
+        </p:spPr>
+        <p:txBody>
+          <a:bodyPr wrap="none" rtlCol="0">
+            <a:spAutoFit/>
+          </a:bodyPr>
+          <a:lstStyle/>
+          <a:p>
+            <a:pPr algn="ctr"/>
+            <a:r>
+              <a:rPr lang="de-DE" sz="1400" b="1" i="1" dirty="0">
+                <a:latin typeface="Open Sans SemiBold" panose="020B0606030504020204" pitchFamily="34" charset="0"/>
+                <a:ea typeface="Open Sans SemiBold" panose="020B0606030504020204" pitchFamily="34" charset="0"/>
+                <a:cs typeface="Open Sans SemiBold" panose="020B0606030504020204" pitchFamily="34" charset="0"/>
+              </a:rPr>
+              <a:t>Rel</a:t>
+            </a:r>
+            <a:r>
+              <a:rPr lang="de-DE" sz="1400" b="1" dirty="0">
+                <a:latin typeface="Open Sans SemiBold" panose="020B0606030504020204" pitchFamily="34" charset="0"/>
+                <a:ea typeface="Open Sans SemiBold" panose="020B0606030504020204" pitchFamily="34" charset="0"/>
+                <a:cs typeface="Open Sans SemiBold" panose="020B0606030504020204" pitchFamily="34" charset="0"/>
+              </a:rPr>
+              <a:t> = .80</a:t>
+            </a:r>
+            <a:endParaRPr lang="de-DE" b="1" dirty="0">
+              <a:latin typeface="Open Sans SemiBold" panose="020B0606030504020204" pitchFamily="34" charset="0"/>
+              <a:ea typeface="Open Sans SemiBold" panose="020B0606030504020204" pitchFamily="34" charset="0"/>
+              <a:cs typeface="Open Sans SemiBold" panose="020B0606030504020204" pitchFamily="34" charset="0"/>
+            </a:endParaRPr>
+          </a:p>
+        </p:txBody>
+      </p:sp>
+      <p:sp>
+        <p:nvSpPr>
+          <p:cNvPr id="5" name="Textfeld 4">
+            <a:extLst>
+              <a:ext uri="{FF2B5EF4-FFF2-40B4-BE49-F238E27FC236}">
+                <a16:creationId xmlns:a16="http://schemas.microsoft.com/office/drawing/2014/main" id="{1E5ACFE9-7433-0787-0045-7C9502F46A2E}"/>
+              </a:ext>
+            </a:extLst>
+          </p:cNvPr>
+          <p:cNvSpPr txBox="1"/>
+          <p:nvPr/>
+        </p:nvSpPr>
+        <p:spPr>
+          <a:xfrm>
+            <a:off x="10472113" y="1172235"/>
+            <a:ext cx="904415" cy="307777"/>
+          </a:xfrm>
+          <a:prstGeom prst="rect">
+            <a:avLst/>
+          </a:prstGeom>
+          <a:solidFill>
+            <a:schemeClr val="bg1"/>
+          </a:solidFill>
+        </p:spPr>
+        <p:txBody>
+          <a:bodyPr wrap="none" rtlCol="0">
+            <a:spAutoFit/>
+          </a:bodyPr>
+          <a:lstStyle/>
+          <a:p>
+            <a:pPr algn="ctr"/>
+            <a:r>
+              <a:rPr lang="de-DE" sz="1400" b="1" i="1" dirty="0">
+                <a:latin typeface="Open Sans SemiBold" panose="020B0606030504020204" pitchFamily="34" charset="0"/>
+                <a:ea typeface="Open Sans SemiBold" panose="020B0606030504020204" pitchFamily="34" charset="0"/>
+                <a:cs typeface="Open Sans SemiBold" panose="020B0606030504020204" pitchFamily="34" charset="0"/>
+              </a:rPr>
+              <a:t>Rel </a:t>
+            </a:r>
+            <a:r>
+              <a:rPr lang="de-DE" sz="1400" b="1" dirty="0">
+                <a:latin typeface="Open Sans SemiBold" panose="020B0606030504020204" pitchFamily="34" charset="0"/>
+                <a:ea typeface="Open Sans SemiBold" panose="020B0606030504020204" pitchFamily="34" charset="0"/>
+                <a:cs typeface="Open Sans SemiBold" panose="020B0606030504020204" pitchFamily="34" charset="0"/>
+              </a:rPr>
+              <a:t>= .60</a:t>
+            </a:r>
+            <a:endParaRPr lang="de-DE" b="1" dirty="0">
+              <a:latin typeface="Open Sans SemiBold" panose="020B0606030504020204" pitchFamily="34" charset="0"/>
+              <a:ea typeface="Open Sans SemiBold" panose="020B0606030504020204" pitchFamily="34" charset="0"/>
+              <a:cs typeface="Open Sans SemiBold" panose="020B0606030504020204" pitchFamily="34" charset="0"/>
+            </a:endParaRPr>
+          </a:p>
+        </p:txBody>
+      </p:sp>
+      <p:sp>
+        <p:nvSpPr>
+          <p:cNvPr id="6" name="Textfeld 5">
+            <a:extLst>
+              <a:ext uri="{FF2B5EF4-FFF2-40B4-BE49-F238E27FC236}">
+                <a16:creationId xmlns:a16="http://schemas.microsoft.com/office/drawing/2014/main" id="{E32E8DD4-E0AA-1C69-89DC-295C69C37BEB}"/>
+              </a:ext>
+            </a:extLst>
+          </p:cNvPr>
+          <p:cNvSpPr txBox="1"/>
+          <p:nvPr/>
+        </p:nvSpPr>
+        <p:spPr>
+          <a:xfrm>
+            <a:off x="8009733" y="2318137"/>
+            <a:ext cx="519941" cy="184666"/>
+          </a:xfrm>
+          <a:prstGeom prst="rect">
+            <a:avLst/>
+          </a:prstGeom>
+          <a:solidFill>
+            <a:schemeClr val="bg1"/>
+          </a:solidFill>
+        </p:spPr>
+        <p:txBody>
+          <a:bodyPr wrap="none" lIns="36000" tIns="0" rIns="36000" bIns="0" rtlCol="0">
+            <a:spAutoFit/>
+          </a:bodyPr>
+          <a:lstStyle/>
+          <a:p>
+            <a:r>
+              <a:rPr lang="de-DE" sz="1200" i="1" dirty="0" err="1">
+                <a:solidFill>
+                  <a:sysClr val="windowText" lastClr="000000"/>
+                </a:solidFill>
+              </a:rPr>
+              <a:t>r</a:t>
+            </a:r>
+            <a:r>
+              <a:rPr lang="de-DE" sz="1200" dirty="0">
+                <a:solidFill>
+                  <a:sysClr val="windowText" lastClr="000000"/>
+                </a:solidFill>
+              </a:rPr>
+              <a:t> = .50</a:t>
+            </a:r>
+          </a:p>
+        </p:txBody>
+      </p:sp>
+      <p:sp>
+        <p:nvSpPr>
+          <p:cNvPr id="9" name="Textfeld 8">
+            <a:extLst>
+              <a:ext uri="{FF2B5EF4-FFF2-40B4-BE49-F238E27FC236}">
+                <a16:creationId xmlns:a16="http://schemas.microsoft.com/office/drawing/2014/main" id="{212CB46B-F529-570B-5ADD-BD1BE19008CC}"/>
+              </a:ext>
+            </a:extLst>
+          </p:cNvPr>
+          <p:cNvSpPr txBox="1"/>
+          <p:nvPr/>
+        </p:nvSpPr>
+        <p:spPr>
+          <a:xfrm>
+            <a:off x="8009733" y="3921201"/>
+            <a:ext cx="519941" cy="184666"/>
+          </a:xfrm>
+          <a:prstGeom prst="rect">
+            <a:avLst/>
+          </a:prstGeom>
+          <a:solidFill>
+            <a:schemeClr val="bg1"/>
+          </a:solidFill>
+        </p:spPr>
+        <p:txBody>
+          <a:bodyPr wrap="none" lIns="36000" tIns="0" rIns="36000" bIns="0" rtlCol="0">
+            <a:spAutoFit/>
+          </a:bodyPr>
+          <a:lstStyle/>
+          <a:p>
+            <a:r>
+              <a:rPr lang="de-DE" sz="1200" i="1" dirty="0" err="1">
+                <a:solidFill>
+                  <a:sysClr val="windowText" lastClr="000000"/>
+                </a:solidFill>
+              </a:rPr>
+              <a:t>r</a:t>
+            </a:r>
+            <a:r>
+              <a:rPr lang="de-DE" sz="1200" dirty="0">
+                <a:solidFill>
+                  <a:sysClr val="windowText" lastClr="000000"/>
+                </a:solidFill>
+              </a:rPr>
+              <a:t> = .30</a:t>
+            </a:r>
+          </a:p>
+        </p:txBody>
+      </p:sp>
+      <p:sp>
+        <p:nvSpPr>
+          <p:cNvPr id="12" name="Textfeld 11">
+            <a:extLst>
+              <a:ext uri="{FF2B5EF4-FFF2-40B4-BE49-F238E27FC236}">
+                <a16:creationId xmlns:a16="http://schemas.microsoft.com/office/drawing/2014/main" id="{EA975C72-A340-8913-9704-DC8ADA49B1E5}"/>
+              </a:ext>
+            </a:extLst>
+          </p:cNvPr>
+          <p:cNvSpPr txBox="1"/>
+          <p:nvPr/>
+        </p:nvSpPr>
+        <p:spPr>
+          <a:xfrm>
+            <a:off x="8010155" y="5520827"/>
+            <a:ext cx="519941" cy="184666"/>
+          </a:xfrm>
+          <a:prstGeom prst="rect">
+            <a:avLst/>
+          </a:prstGeom>
+          <a:solidFill>
+            <a:schemeClr val="bg1"/>
+          </a:solidFill>
+        </p:spPr>
+        <p:txBody>
+          <a:bodyPr wrap="none" lIns="36000" tIns="0" rIns="36000" bIns="0" rtlCol="0">
+            <a:spAutoFit/>
+          </a:bodyPr>
+          <a:lstStyle/>
+          <a:p>
+            <a:r>
+              <a:rPr lang="de-DE" sz="1200" i="1" dirty="0" err="1">
+                <a:solidFill>
+                  <a:sysClr val="windowText" lastClr="000000"/>
+                </a:solidFill>
+              </a:rPr>
+              <a:t>r</a:t>
+            </a:r>
+            <a:r>
+              <a:rPr lang="de-DE" sz="1200" dirty="0">
+                <a:solidFill>
+                  <a:sysClr val="windowText" lastClr="000000"/>
+                </a:solidFill>
+              </a:rPr>
+              <a:t> = .10</a:t>
+            </a:r>
+          </a:p>
+        </p:txBody>
+      </p:sp>
+      <p:sp>
+        <p:nvSpPr>
+          <p:cNvPr id="13" name="Textfeld 12">
+            <a:extLst>
+              <a:ext uri="{FF2B5EF4-FFF2-40B4-BE49-F238E27FC236}">
+                <a16:creationId xmlns:a16="http://schemas.microsoft.com/office/drawing/2014/main" id="{4619C551-1016-289C-8235-4FA9ADC16B0D}"/>
+              </a:ext>
+            </a:extLst>
+          </p:cNvPr>
+          <p:cNvSpPr txBox="1"/>
+          <p:nvPr/>
+        </p:nvSpPr>
+        <p:spPr>
+          <a:xfrm>
+            <a:off x="9461545" y="2314699"/>
+            <a:ext cx="519941" cy="184666"/>
+          </a:xfrm>
+          <a:prstGeom prst="rect">
+            <a:avLst/>
+          </a:prstGeom>
+          <a:solidFill>
+            <a:schemeClr val="bg1"/>
+          </a:solidFill>
+        </p:spPr>
+        <p:txBody>
+          <a:bodyPr wrap="none" lIns="36000" tIns="0" rIns="36000" bIns="0" rtlCol="0">
+            <a:spAutoFit/>
+          </a:bodyPr>
+          <a:lstStyle/>
+          <a:p>
+            <a:r>
+              <a:rPr lang="de-DE" sz="1200" i="1" dirty="0" err="1">
+                <a:solidFill>
+                  <a:schemeClr val="accent2"/>
+                </a:solidFill>
+              </a:rPr>
+              <a:t>r</a:t>
+            </a:r>
+            <a:r>
+              <a:rPr lang="de-DE" sz="1200" dirty="0">
+                <a:solidFill>
+                  <a:schemeClr val="accent2"/>
+                </a:solidFill>
+              </a:rPr>
+              <a:t> = .38</a:t>
+            </a:r>
+          </a:p>
+        </p:txBody>
+      </p:sp>
+      <p:sp>
+        <p:nvSpPr>
+          <p:cNvPr id="14" name="Textfeld 13">
+            <a:extLst>
+              <a:ext uri="{FF2B5EF4-FFF2-40B4-BE49-F238E27FC236}">
+                <a16:creationId xmlns:a16="http://schemas.microsoft.com/office/drawing/2014/main" id="{548DD2F6-5018-637F-38A8-84B5E437167C}"/>
+              </a:ext>
+            </a:extLst>
+          </p:cNvPr>
+          <p:cNvSpPr txBox="1"/>
+          <p:nvPr/>
+        </p:nvSpPr>
+        <p:spPr>
+          <a:xfrm>
+            <a:off x="9461545" y="3917763"/>
+            <a:ext cx="519941" cy="184666"/>
+          </a:xfrm>
+          <a:prstGeom prst="rect">
+            <a:avLst/>
+          </a:prstGeom>
+          <a:solidFill>
+            <a:schemeClr val="bg1"/>
+          </a:solidFill>
+        </p:spPr>
+        <p:txBody>
+          <a:bodyPr wrap="none" lIns="36000" tIns="0" rIns="36000" bIns="0" rtlCol="0">
+            <a:spAutoFit/>
+          </a:bodyPr>
+          <a:lstStyle/>
+          <a:p>
+            <a:r>
+              <a:rPr lang="de-DE" sz="1200" i="1" dirty="0" err="1">
+                <a:solidFill>
+                  <a:schemeClr val="accent2"/>
+                </a:solidFill>
+              </a:rPr>
+              <a:t>r</a:t>
+            </a:r>
+            <a:r>
+              <a:rPr lang="de-DE" sz="1200" dirty="0">
+                <a:solidFill>
+                  <a:schemeClr val="accent2"/>
+                </a:solidFill>
+              </a:rPr>
+              <a:t> = .27</a:t>
+            </a:r>
+          </a:p>
+        </p:txBody>
+      </p:sp>
+      <p:sp>
+        <p:nvSpPr>
+          <p:cNvPr id="15" name="Textfeld 14">
+            <a:extLst>
+              <a:ext uri="{FF2B5EF4-FFF2-40B4-BE49-F238E27FC236}">
+                <a16:creationId xmlns:a16="http://schemas.microsoft.com/office/drawing/2014/main" id="{DB6DCA7C-FE5D-D949-E9A6-2F27B2CFC889}"/>
+              </a:ext>
+            </a:extLst>
+          </p:cNvPr>
+          <p:cNvSpPr txBox="1"/>
+          <p:nvPr/>
+        </p:nvSpPr>
+        <p:spPr>
+          <a:xfrm>
+            <a:off x="9461967" y="5517389"/>
+            <a:ext cx="519941" cy="184666"/>
+          </a:xfrm>
+          <a:prstGeom prst="rect">
+            <a:avLst/>
+          </a:prstGeom>
+          <a:solidFill>
+            <a:schemeClr val="bg1"/>
+          </a:solidFill>
+        </p:spPr>
+        <p:txBody>
+          <a:bodyPr wrap="none" lIns="36000" tIns="0" rIns="36000" bIns="0" rtlCol="0">
+            <a:spAutoFit/>
+          </a:bodyPr>
+          <a:lstStyle/>
+          <a:p>
+            <a:r>
+              <a:rPr lang="de-DE" sz="1200" i="1" dirty="0" err="1">
+                <a:solidFill>
+                  <a:schemeClr val="accent2"/>
+                </a:solidFill>
+              </a:rPr>
+              <a:t>r</a:t>
+            </a:r>
+            <a:r>
+              <a:rPr lang="de-DE" sz="1200" dirty="0">
+                <a:solidFill>
+                  <a:schemeClr val="accent2"/>
+                </a:solidFill>
+              </a:rPr>
+              <a:t> = .06</a:t>
+            </a:r>
+          </a:p>
+        </p:txBody>
+      </p:sp>
+      <p:sp>
+        <p:nvSpPr>
+          <p:cNvPr id="16" name="Textfeld 15">
+            <a:extLst>
+              <a:ext uri="{FF2B5EF4-FFF2-40B4-BE49-F238E27FC236}">
+                <a16:creationId xmlns:a16="http://schemas.microsoft.com/office/drawing/2014/main" id="{C7599DEB-27E4-D653-41C9-2D07AA32F734}"/>
+              </a:ext>
+            </a:extLst>
+          </p:cNvPr>
+          <p:cNvSpPr txBox="1"/>
+          <p:nvPr/>
+        </p:nvSpPr>
+        <p:spPr>
+          <a:xfrm>
+            <a:off x="10923672" y="2318137"/>
+            <a:ext cx="519941" cy="184666"/>
+          </a:xfrm>
+          <a:prstGeom prst="rect">
+            <a:avLst/>
+          </a:prstGeom>
+          <a:solidFill>
+            <a:schemeClr val="bg1"/>
+          </a:solidFill>
+        </p:spPr>
+        <p:txBody>
+          <a:bodyPr wrap="none" lIns="36000" tIns="0" rIns="36000" bIns="0" rtlCol="0">
+            <a:spAutoFit/>
+          </a:bodyPr>
+          <a:lstStyle/>
+          <a:p>
+            <a:r>
+              <a:rPr lang="de-DE" sz="1200" i="1" dirty="0" err="1">
+                <a:solidFill>
+                  <a:srgbClr val="C00000"/>
+                </a:solidFill>
+              </a:rPr>
+              <a:t>r</a:t>
+            </a:r>
+            <a:r>
+              <a:rPr lang="de-DE" sz="1200" dirty="0">
+                <a:solidFill>
+                  <a:srgbClr val="C00000"/>
+                </a:solidFill>
+              </a:rPr>
+              <a:t> = .22</a:t>
+            </a:r>
+          </a:p>
+        </p:txBody>
+      </p:sp>
+      <p:sp>
+        <p:nvSpPr>
+          <p:cNvPr id="17" name="Textfeld 16">
+            <a:extLst>
+              <a:ext uri="{FF2B5EF4-FFF2-40B4-BE49-F238E27FC236}">
+                <a16:creationId xmlns:a16="http://schemas.microsoft.com/office/drawing/2014/main" id="{E7915867-0DCB-D8F9-A797-1F94F19EFC53}"/>
+              </a:ext>
+            </a:extLst>
+          </p:cNvPr>
+          <p:cNvSpPr txBox="1"/>
+          <p:nvPr/>
+        </p:nvSpPr>
+        <p:spPr>
+          <a:xfrm>
+            <a:off x="10923672" y="3921201"/>
+            <a:ext cx="519941" cy="184666"/>
+          </a:xfrm>
+          <a:prstGeom prst="rect">
+            <a:avLst/>
+          </a:prstGeom>
+          <a:solidFill>
+            <a:schemeClr val="bg1"/>
+          </a:solidFill>
+        </p:spPr>
+        <p:txBody>
+          <a:bodyPr wrap="none" lIns="36000" tIns="0" rIns="36000" bIns="0" rtlCol="0">
+            <a:spAutoFit/>
+          </a:bodyPr>
+          <a:lstStyle/>
+          <a:p>
+            <a:r>
+              <a:rPr lang="de-DE" sz="1200" i="1" dirty="0" err="1">
+                <a:solidFill>
+                  <a:srgbClr val="C00000"/>
+                </a:solidFill>
+              </a:rPr>
+              <a:t>r</a:t>
+            </a:r>
+            <a:r>
+              <a:rPr lang="de-DE" sz="1200" dirty="0">
+                <a:solidFill>
+                  <a:srgbClr val="C00000"/>
+                </a:solidFill>
+              </a:rPr>
+              <a:t> = .14</a:t>
+            </a:r>
+          </a:p>
+        </p:txBody>
+      </p:sp>
+      <p:sp>
+        <p:nvSpPr>
+          <p:cNvPr id="18" name="Textfeld 17">
+            <a:extLst>
+              <a:ext uri="{FF2B5EF4-FFF2-40B4-BE49-F238E27FC236}">
+                <a16:creationId xmlns:a16="http://schemas.microsoft.com/office/drawing/2014/main" id="{F131BCA6-5983-7381-150A-5DAB8BEC8693}"/>
+              </a:ext>
+            </a:extLst>
+          </p:cNvPr>
+          <p:cNvSpPr txBox="1"/>
+          <p:nvPr/>
+        </p:nvSpPr>
+        <p:spPr>
+          <a:xfrm>
+            <a:off x="10924094" y="5520827"/>
+            <a:ext cx="519941" cy="184666"/>
+          </a:xfrm>
+          <a:prstGeom prst="rect">
+            <a:avLst/>
+          </a:prstGeom>
+          <a:solidFill>
+            <a:schemeClr val="bg1"/>
+          </a:solidFill>
+        </p:spPr>
+        <p:txBody>
+          <a:bodyPr wrap="none" lIns="36000" tIns="0" rIns="36000" bIns="0" rtlCol="0">
+            <a:spAutoFit/>
+          </a:bodyPr>
+          <a:lstStyle/>
+          <a:p>
+            <a:r>
+              <a:rPr lang="de-DE" sz="1200" i="1" dirty="0" err="1">
+                <a:solidFill>
+                  <a:srgbClr val="C00000"/>
+                </a:solidFill>
+              </a:rPr>
+              <a:t>r</a:t>
+            </a:r>
+            <a:r>
+              <a:rPr lang="de-DE" sz="1200" dirty="0">
+                <a:solidFill>
+                  <a:srgbClr val="C00000"/>
+                </a:solidFill>
+              </a:rPr>
+              <a:t> = .03</a:t>
+            </a:r>
+          </a:p>
+        </p:txBody>
+      </p:sp>
     </p:spTree>
     <p:custDataLst>
       <p:tags r:id="rId1"/>
@@ -9894,13 +10856,13 @@
   <p:clrMapOvr>
     <a:masterClrMapping/>
   </p:clrMapOvr>
-  <mc:AlternateContent xmlns:mc="http://schemas.openxmlformats.org/markup-compatibility/2006">
-    <mc:Choice xmlns:p14="http://schemas.microsoft.com/office/powerpoint/2010/main" Requires="p14">
+  <mc:AlternateContent xmlns:mc="http://schemas.openxmlformats.org/markup-compatibility/2006" xmlns:p14="http://schemas.microsoft.com/office/powerpoint/2010/main">
+    <mc:Choice Requires="p14">
       <p:transition spd="med" p14:dur="700">
         <p:fade/>
       </p:transition>
     </mc:Choice>
-    <mc:Fallback>
+    <mc:Fallback xmlns="">
       <p:transition spd="med">
         <p:fade/>
       </p:transition>
@@ -10770,7 +11732,7 @@
                 <a:ea typeface="Open Sans" panose="020B0606030504020204" pitchFamily="34" charset="0"/>
                 <a:cs typeface="Open Sans" panose="020B0606030504020204" pitchFamily="34" charset="0"/>
               </a:rPr>
-              <a:t> for range restriction (easiest case, variance restriction only in </a:t>
+              <a:t> for range restriction – easiest case, variance restriction only in </a:t>
             </a:r>
             <a:r>
               <a:rPr lang="en-US" i="1" noProof="1">
@@ -10784,7 +11746,7 @@
                 <a:ea typeface="Open Sans" panose="020B0606030504020204" pitchFamily="34" charset="0"/>
                 <a:cs typeface="Open Sans" panose="020B0606030504020204" pitchFamily="34" charset="0"/>
               </a:rPr>
-              <a:t>)</a:t>
+              <a:t>:</a:t>
             </a:r>
             <a:endParaRPr lang="en-US" b="1" noProof="1">
               <a:solidFill>
@@ -10804,66 +11766,6 @@
             <a:endParaRPr lang="en-US" sz="1800" b="1" noProof="1">
               <a:ea typeface="Open Sans" panose="020B0606030504020204" pitchFamily="34" charset="0"/>
               <a:cs typeface="Open Sans" panose="020B0606030504020204" pitchFamily="34" charset="0"/>
-            </a:endParaRPr>
-          </a:p>
-        </p:txBody>
-      </p:sp>
-      <p:sp>
-        <p:nvSpPr>
-          <p:cNvPr id="10" name="Textfeld 9">
-            <a:extLst>
-              <a:ext uri="{FF2B5EF4-FFF2-40B4-BE49-F238E27FC236}">
-                <a16:creationId xmlns:a16="http://schemas.microsoft.com/office/drawing/2014/main" id="{659DCA8A-CB62-E27C-0C78-D396E144EB5C}"/>
-              </a:ext>
-            </a:extLst>
-          </p:cNvPr>
-          <p:cNvSpPr txBox="1"/>
-          <p:nvPr/>
-        </p:nvSpPr>
-        <p:spPr>
-          <a:xfrm rot="16200000">
-            <a:off x="10229663" y="3305888"/>
-            <a:ext cx="2854036" cy="246221"/>
-          </a:xfrm>
-          <a:prstGeom prst="rect">
-            <a:avLst/>
-          </a:prstGeom>
-          <a:noFill/>
-        </p:spPr>
-        <p:txBody>
-          <a:bodyPr wrap="square">
-            <a:spAutoFit/>
-          </a:bodyPr>
-          <a:lstStyle/>
-          <a:p>
-            <a:pPr algn="ctr" eaLnBrk="1" hangingPunct="1">
-              <a:spcAft>
-                <a:spcPts val="1200"/>
-              </a:spcAft>
-              <a:defRPr/>
-            </a:pPr>
-            <a:r>
-              <a:rPr lang="en-US" sz="1000" dirty="0">
-                <a:solidFill>
-                  <a:schemeClr val="bg1">
-                    <a:lumMod val="50000"/>
-                  </a:schemeClr>
-                </a:solidFill>
-                <a:latin typeface="Open Sans Normal" charset="0"/>
-                <a:ea typeface="Open Sans Normal" charset="0"/>
-                <a:cs typeface="Open Sans Normal" charset="0"/>
-              </a:rPr>
-              <a:t>data simulated with R</a:t>
-            </a:r>
-            <a:endParaRPr lang="en-US" sz="1000" b="1" dirty="0">
-              <a:solidFill>
-                <a:schemeClr val="bg1">
-                  <a:lumMod val="50000"/>
-                </a:schemeClr>
-              </a:solidFill>
-              <a:latin typeface="Open Sans SemiBold" panose="020B0606030504020204" pitchFamily="34" charset="0"/>
-              <a:ea typeface="Open Sans SemiBold" panose="020B0606030504020204" pitchFamily="34" charset="0"/>
-              <a:cs typeface="Open Sans SemiBold" panose="020B0606030504020204" pitchFamily="34" charset="0"/>
             </a:endParaRPr>
           </a:p>
         </p:txBody>
@@ -11098,10 +12000,10 @@
       </p:sp>
       <p:pic>
         <p:nvPicPr>
-          <p:cNvPr id="2" name="Grafik 1">
+          <p:cNvPr id="21" name="Grafik 20">
             <a:extLst>
               <a:ext uri="{FF2B5EF4-FFF2-40B4-BE49-F238E27FC236}">
-                <a16:creationId xmlns:a16="http://schemas.microsoft.com/office/drawing/2014/main" id="{2FEEDDB6-EE3E-3FCF-6671-2474BFD80B67}"/>
+                <a16:creationId xmlns:a16="http://schemas.microsoft.com/office/drawing/2014/main" id="{7AFED15D-3916-F5B0-FFA8-26D4BBD723C5}"/>
               </a:ext>
             </a:extLst>
           </p:cNvPr>
@@ -11112,17 +12014,22 @@
         </p:nvPicPr>
         <p:blipFill>
           <a:blip r:embed="rId4">
-            <a:alphaModFix/>
+            <a:duotone>
+              <a:schemeClr val="accent2">
+                <a:shade val="45000"/>
+                <a:satMod val="135000"/>
+              </a:schemeClr>
+              <a:prstClr val="white"/>
+            </a:duotone>
           </a:blip>
-          <a:srcRect t="32627" b="33074"/>
           <a:stretch>
             <a:fillRect/>
           </a:stretch>
         </p:blipFill>
         <p:spPr>
           <a:xfrm>
-            <a:off x="8680606" y="2841917"/>
-            <a:ext cx="1365092" cy="1600199"/>
+            <a:off x="2826074" y="5488584"/>
+            <a:ext cx="2227828" cy="450105"/>
           </a:xfrm>
           <a:prstGeom prst="rect">
             <a:avLst/>
@@ -11131,10 +12038,10 @@
       </p:pic>
       <p:sp>
         <p:nvSpPr>
-          <p:cNvPr id="12" name="Textfeld 11">
+          <p:cNvPr id="4" name="Textfeld 3">
             <a:extLst>
               <a:ext uri="{FF2B5EF4-FFF2-40B4-BE49-F238E27FC236}">
-                <a16:creationId xmlns:a16="http://schemas.microsoft.com/office/drawing/2014/main" id="{BC83C9E2-7727-BAD1-4C1F-4BF28B982D45}"/>
+                <a16:creationId xmlns:a16="http://schemas.microsoft.com/office/drawing/2014/main" id="{130B71E5-A617-21E8-F6D2-B52E6090FEF7}"/>
               </a:ext>
             </a:extLst>
           </p:cNvPr>
@@ -11142,9 +12049,9 @@
           <p:nvPr/>
         </p:nvSpPr>
         <p:spPr>
-          <a:xfrm>
-            <a:off x="10036806" y="3459551"/>
-            <a:ext cx="1205395" cy="307777"/>
+          <a:xfrm rot="16200000">
+            <a:off x="10229663" y="3481206"/>
+            <a:ext cx="2854036" cy="246221"/>
           </a:xfrm>
           <a:prstGeom prst="rect">
             <a:avLst/>
@@ -11152,24 +12059,267 @@
           <a:noFill/>
         </p:spPr>
         <p:txBody>
-          <a:bodyPr wrap="none" rtlCol="0">
+          <a:bodyPr wrap="square">
             <a:spAutoFit/>
           </a:bodyPr>
           <a:lstStyle/>
           <a:p>
-            <a:r>
-              <a:rPr lang="en-US" sz="1400" dirty="0"/>
-              <a:t>unrestricted</a:t>
-            </a:r>
+            <a:pPr algn="ctr" eaLnBrk="1" hangingPunct="1">
+              <a:spcAft>
+                <a:spcPts val="1200"/>
+              </a:spcAft>
+              <a:defRPr/>
+            </a:pPr>
+            <a:r>
+              <a:rPr lang="en-US" sz="1000" dirty="0">
+                <a:solidFill>
+                  <a:schemeClr val="bg1">
+                    <a:lumMod val="50000"/>
+                  </a:schemeClr>
+                </a:solidFill>
+                <a:latin typeface="Open Sans Normal" charset="0"/>
+                <a:ea typeface="Open Sans Normal" charset="0"/>
+                <a:cs typeface="Open Sans Normal" charset="0"/>
+              </a:rPr>
+              <a:t>data simulated with R</a:t>
+            </a:r>
+            <a:endParaRPr lang="en-US" sz="1000" b="1" dirty="0">
+              <a:solidFill>
+                <a:schemeClr val="bg1">
+                  <a:lumMod val="50000"/>
+                </a:schemeClr>
+              </a:solidFill>
+              <a:latin typeface="Open Sans SemiBold" panose="020B0606030504020204" pitchFamily="34" charset="0"/>
+              <a:ea typeface="Open Sans SemiBold" panose="020B0606030504020204" pitchFamily="34" charset="0"/>
+              <a:cs typeface="Open Sans SemiBold" panose="020B0606030504020204" pitchFamily="34" charset="0"/>
+            </a:endParaRPr>
           </a:p>
         </p:txBody>
       </p:sp>
       <p:grpSp>
         <p:nvGrpSpPr>
-          <p:cNvPr id="24" name="Gruppieren 23">
+          <p:cNvPr id="29" name="Gruppieren 28">
             <a:extLst>
               <a:ext uri="{FF2B5EF4-FFF2-40B4-BE49-F238E27FC236}">
-                <a16:creationId xmlns:a16="http://schemas.microsoft.com/office/drawing/2014/main" id="{30C69407-EBC7-AD15-F365-904FA827DA4B}"/>
+                <a16:creationId xmlns:a16="http://schemas.microsoft.com/office/drawing/2014/main" id="{C2B84FCE-46E2-2D7B-3452-BC877193F0A0}"/>
+              </a:ext>
+            </a:extLst>
+          </p:cNvPr>
+          <p:cNvGrpSpPr/>
+          <p:nvPr/>
+        </p:nvGrpSpPr>
+        <p:grpSpPr>
+          <a:xfrm>
+            <a:off x="7224555" y="2841917"/>
+            <a:ext cx="4017646" cy="1619247"/>
+            <a:chOff x="7224555" y="2841917"/>
+            <a:chExt cx="4017646" cy="1619247"/>
+          </a:xfrm>
+        </p:grpSpPr>
+        <p:pic>
+          <p:nvPicPr>
+            <p:cNvPr id="2" name="Grafik 1">
+              <a:extLst>
+                <a:ext uri="{FF2B5EF4-FFF2-40B4-BE49-F238E27FC236}">
+                  <a16:creationId xmlns:a16="http://schemas.microsoft.com/office/drawing/2014/main" id="{2FEEDDB6-EE3E-3FCF-6671-2474BFD80B67}"/>
+                </a:ext>
+              </a:extLst>
+            </p:cNvPr>
+            <p:cNvPicPr>
+              <a:picLocks noChangeAspect="1"/>
+            </p:cNvPicPr>
+            <p:nvPr/>
+          </p:nvPicPr>
+          <p:blipFill>
+            <a:blip r:embed="rId5">
+              <a:alphaModFix/>
+            </a:blip>
+            <a:srcRect t="32627" b="33074"/>
+            <a:stretch>
+              <a:fillRect/>
+            </a:stretch>
+          </p:blipFill>
+          <p:spPr>
+            <a:xfrm>
+              <a:off x="8680606" y="2841917"/>
+              <a:ext cx="1365092" cy="1600199"/>
+            </a:xfrm>
+            <a:prstGeom prst="rect">
+              <a:avLst/>
+            </a:prstGeom>
+          </p:spPr>
+        </p:pic>
+        <p:sp>
+          <p:nvSpPr>
+            <p:cNvPr id="12" name="Textfeld 11">
+              <a:extLst>
+                <a:ext uri="{FF2B5EF4-FFF2-40B4-BE49-F238E27FC236}">
+                  <a16:creationId xmlns:a16="http://schemas.microsoft.com/office/drawing/2014/main" id="{BC83C9E2-7727-BAD1-4C1F-4BF28B982D45}"/>
+                </a:ext>
+              </a:extLst>
+            </p:cNvPr>
+            <p:cNvSpPr txBox="1"/>
+            <p:nvPr/>
+          </p:nvSpPr>
+          <p:spPr>
+            <a:xfrm>
+              <a:off x="10036806" y="3459551"/>
+              <a:ext cx="1205395" cy="307777"/>
+            </a:xfrm>
+            <a:prstGeom prst="rect">
+              <a:avLst/>
+            </a:prstGeom>
+            <a:noFill/>
+          </p:spPr>
+          <p:txBody>
+            <a:bodyPr wrap="none" rtlCol="0">
+              <a:spAutoFit/>
+            </a:bodyPr>
+            <a:lstStyle/>
+            <a:p>
+              <a:r>
+                <a:rPr lang="en-US" sz="1400" dirty="0"/>
+                <a:t>unrestricted</a:t>
+              </a:r>
+            </a:p>
+          </p:txBody>
+        </p:sp>
+        <p:pic>
+          <p:nvPicPr>
+            <p:cNvPr id="26" name="Grafik 25">
+              <a:extLst>
+                <a:ext uri="{FF2B5EF4-FFF2-40B4-BE49-F238E27FC236}">
+                  <a16:creationId xmlns:a16="http://schemas.microsoft.com/office/drawing/2014/main" id="{EF5A5CA1-8DAB-6572-DD2A-3D909CEB6F83}"/>
+                </a:ext>
+              </a:extLst>
+            </p:cNvPr>
+            <p:cNvPicPr>
+              <a:picLocks noChangeAspect="1"/>
+            </p:cNvPicPr>
+            <p:nvPr/>
+          </p:nvPicPr>
+          <p:blipFill>
+            <a:blip r:embed="rId6"/>
+            <a:srcRect t="32526" r="66947" b="32714"/>
+            <a:stretch>
+              <a:fillRect/>
+            </a:stretch>
+          </p:blipFill>
+          <p:spPr>
+            <a:xfrm>
+              <a:off x="7224555" y="2841917"/>
+              <a:ext cx="1403898" cy="1619247"/>
+            </a:xfrm>
+            <a:prstGeom prst="rect">
+              <a:avLst/>
+            </a:prstGeom>
+          </p:spPr>
+        </p:pic>
+        <p:sp>
+          <p:nvSpPr>
+            <p:cNvPr id="8" name="Textfeld 7">
+              <a:extLst>
+                <a:ext uri="{FF2B5EF4-FFF2-40B4-BE49-F238E27FC236}">
+                  <a16:creationId xmlns:a16="http://schemas.microsoft.com/office/drawing/2014/main" id="{48E71583-1EC4-E997-07C6-093CE65F27AE}"/>
+                </a:ext>
+              </a:extLst>
+            </p:cNvPr>
+            <p:cNvSpPr txBox="1"/>
+            <p:nvPr/>
+          </p:nvSpPr>
+          <p:spPr>
+            <a:xfrm>
+              <a:off x="8009733" y="3921201"/>
+              <a:ext cx="519941" cy="184666"/>
+            </a:xfrm>
+            <a:prstGeom prst="rect">
+              <a:avLst/>
+            </a:prstGeom>
+            <a:solidFill>
+              <a:schemeClr val="bg1"/>
+            </a:solidFill>
+          </p:spPr>
+          <p:txBody>
+            <a:bodyPr wrap="none" lIns="36000" tIns="0" rIns="36000" bIns="0" rtlCol="0">
+              <a:spAutoFit/>
+            </a:bodyPr>
+            <a:lstStyle/>
+            <a:p>
+              <a:r>
+                <a:rPr lang="de-DE" sz="1200" i="1" dirty="0" err="1">
+                  <a:solidFill>
+                    <a:sysClr val="windowText" lastClr="000000"/>
+                  </a:solidFill>
+                </a:rPr>
+                <a:t>r</a:t>
+              </a:r>
+              <a:r>
+                <a:rPr lang="de-DE" sz="1200" dirty="0">
+                  <a:solidFill>
+                    <a:sysClr val="windowText" lastClr="000000"/>
+                  </a:solidFill>
+                </a:rPr>
+                <a:t> = .30</a:t>
+              </a:r>
+            </a:p>
+          </p:txBody>
+        </p:sp>
+        <p:sp>
+          <p:nvSpPr>
+            <p:cNvPr id="16" name="Textfeld 15">
+              <a:extLst>
+                <a:ext uri="{FF2B5EF4-FFF2-40B4-BE49-F238E27FC236}">
+                  <a16:creationId xmlns:a16="http://schemas.microsoft.com/office/drawing/2014/main" id="{8A2FD695-00B0-34A9-5FC9-F1BB5F16D980}"/>
+                </a:ext>
+              </a:extLst>
+            </p:cNvPr>
+            <p:cNvSpPr txBox="1"/>
+            <p:nvPr/>
+          </p:nvSpPr>
+          <p:spPr>
+            <a:xfrm>
+              <a:off x="9461545" y="3917763"/>
+              <a:ext cx="519941" cy="184666"/>
+            </a:xfrm>
+            <a:prstGeom prst="rect">
+              <a:avLst/>
+            </a:prstGeom>
+            <a:solidFill>
+              <a:schemeClr val="bg1"/>
+            </a:solidFill>
+          </p:spPr>
+          <p:txBody>
+            <a:bodyPr wrap="none" lIns="36000" tIns="0" rIns="36000" bIns="0" rtlCol="0">
+              <a:spAutoFit/>
+            </a:bodyPr>
+            <a:lstStyle/>
+            <a:p>
+              <a:r>
+                <a:rPr lang="de-DE" sz="1200" i="1" dirty="0" err="1">
+                  <a:solidFill>
+                    <a:schemeClr val="accent2"/>
+                  </a:solidFill>
+                </a:rPr>
+                <a:t>r</a:t>
+              </a:r>
+              <a:r>
+                <a:rPr lang="de-DE" sz="1200" dirty="0">
+                  <a:solidFill>
+                    <a:schemeClr val="accent2"/>
+                  </a:solidFill>
+                </a:rPr>
+                <a:t> = .27</a:t>
+              </a:r>
+            </a:p>
+          </p:txBody>
+        </p:sp>
+      </p:grpSp>
+      <p:grpSp>
+        <p:nvGrpSpPr>
+          <p:cNvPr id="20" name="Gruppieren 19">
+            <a:extLst>
+              <a:ext uri="{FF2B5EF4-FFF2-40B4-BE49-F238E27FC236}">
+                <a16:creationId xmlns:a16="http://schemas.microsoft.com/office/drawing/2014/main" id="{3767EE04-A155-85BD-BA42-4DA8384311D2}"/>
               </a:ext>
             </a:extLst>
           </p:cNvPr>
@@ -11184,45 +12334,171 @@
             <a:chExt cx="2774793" cy="1522186"/>
           </a:xfrm>
         </p:grpSpPr>
-        <p:pic>
-          <p:nvPicPr>
-            <p:cNvPr id="22" name="Grafik 21">
+        <p:grpSp>
+          <p:nvGrpSpPr>
+            <p:cNvPr id="18" name="Gruppieren 17">
               <a:extLst>
                 <a:ext uri="{FF2B5EF4-FFF2-40B4-BE49-F238E27FC236}">
-                  <a16:creationId xmlns:a16="http://schemas.microsoft.com/office/drawing/2014/main" id="{0E426227-D22F-86CD-B203-2ED348FA4057}"/>
+                  <a16:creationId xmlns:a16="http://schemas.microsoft.com/office/drawing/2014/main" id="{FE769882-7D1A-C082-5389-D5A19636ED2E}"/>
                 </a:ext>
               </a:extLst>
             </p:cNvPr>
-            <p:cNvPicPr>
-              <a:picLocks noChangeAspect="1"/>
-            </p:cNvPicPr>
+            <p:cNvGrpSpPr/>
             <p:nvPr/>
-          </p:nvPicPr>
-          <p:blipFill>
-            <a:blip r:embed="rId4">
-              <a:alphaModFix/>
-            </a:blip>
-            <a:srcRect b="67373"/>
-            <a:stretch>
-              <a:fillRect/>
-            </a:stretch>
-          </p:blipFill>
-          <p:spPr>
+          </p:nvGrpSpPr>
+          <p:grpSpPr>
             <a:xfrm>
               <a:off x="8680606" y="1319731"/>
-              <a:ext cx="1365092" cy="1522186"/>
+              <a:ext cx="2774793" cy="1522186"/>
+              <a:chOff x="8680606" y="1319731"/>
+              <a:chExt cx="2774793" cy="1522186"/>
             </a:xfrm>
-            <a:prstGeom prst="rect">
-              <a:avLst/>
-            </a:prstGeom>
-          </p:spPr>
-        </p:pic>
+          </p:grpSpPr>
+          <p:grpSp>
+            <p:nvGrpSpPr>
+              <p:cNvPr id="24" name="Gruppieren 23">
+                <a:extLst>
+                  <a:ext uri="{FF2B5EF4-FFF2-40B4-BE49-F238E27FC236}">
+                    <a16:creationId xmlns:a16="http://schemas.microsoft.com/office/drawing/2014/main" id="{30C69407-EBC7-AD15-F365-904FA827DA4B}"/>
+                  </a:ext>
+                </a:extLst>
+              </p:cNvPr>
+              <p:cNvGrpSpPr/>
+              <p:nvPr/>
+            </p:nvGrpSpPr>
+            <p:grpSpPr>
+              <a:xfrm>
+                <a:off x="8680606" y="1319731"/>
+                <a:ext cx="2774793" cy="1522186"/>
+                <a:chOff x="8680606" y="1319731"/>
+                <a:chExt cx="2774793" cy="1522186"/>
+              </a:xfrm>
+            </p:grpSpPr>
+            <p:pic>
+              <p:nvPicPr>
+                <p:cNvPr id="22" name="Grafik 21">
+                  <a:extLst>
+                    <a:ext uri="{FF2B5EF4-FFF2-40B4-BE49-F238E27FC236}">
+                      <a16:creationId xmlns:a16="http://schemas.microsoft.com/office/drawing/2014/main" id="{0E426227-D22F-86CD-B203-2ED348FA4057}"/>
+                    </a:ext>
+                  </a:extLst>
+                </p:cNvPr>
+                <p:cNvPicPr>
+                  <a:picLocks noChangeAspect="1"/>
+                </p:cNvPicPr>
+                <p:nvPr/>
+              </p:nvPicPr>
+              <p:blipFill>
+                <a:blip r:embed="rId5">
+                  <a:alphaModFix/>
+                </a:blip>
+                <a:srcRect b="67373"/>
+                <a:stretch>
+                  <a:fillRect/>
+                </a:stretch>
+              </p:blipFill>
+              <p:spPr>
+                <a:xfrm>
+                  <a:off x="8680606" y="1319731"/>
+                  <a:ext cx="1365092" cy="1522186"/>
+                </a:xfrm>
+                <a:prstGeom prst="rect">
+                  <a:avLst/>
+                </a:prstGeom>
+              </p:spPr>
+            </p:pic>
+            <p:sp>
+              <p:nvSpPr>
+                <p:cNvPr id="13" name="Textfeld 12">
+                  <a:extLst>
+                    <a:ext uri="{FF2B5EF4-FFF2-40B4-BE49-F238E27FC236}">
+                      <a16:creationId xmlns:a16="http://schemas.microsoft.com/office/drawing/2014/main" id="{1B08C61B-EF56-923C-5D94-DF7B0AE3278E}"/>
+                    </a:ext>
+                  </a:extLst>
+                </p:cNvPr>
+                <p:cNvSpPr txBox="1"/>
+                <p:nvPr/>
+              </p:nvSpPr>
+              <p:spPr>
+                <a:xfrm>
+                  <a:off x="10036806" y="1848091"/>
+                  <a:ext cx="1418593" cy="307777"/>
+                </a:xfrm>
+                <a:prstGeom prst="rect">
+                  <a:avLst/>
+                </a:prstGeom>
+                <a:noFill/>
+              </p:spPr>
+              <p:txBody>
+                <a:bodyPr wrap="none" rtlCol="0">
+                  <a:spAutoFit/>
+                </a:bodyPr>
+                <a:lstStyle/>
+                <a:p>
+                  <a:r>
+                    <a:rPr lang="en-US" sz="1400" dirty="0"/>
+                    <a:t>restricted by X</a:t>
+                  </a:r>
+                </a:p>
+              </p:txBody>
+            </p:sp>
+          </p:grpSp>
+          <p:sp>
+            <p:nvSpPr>
+              <p:cNvPr id="15" name="Textfeld 14">
+                <a:extLst>
+                  <a:ext uri="{FF2B5EF4-FFF2-40B4-BE49-F238E27FC236}">
+                    <a16:creationId xmlns:a16="http://schemas.microsoft.com/office/drawing/2014/main" id="{40225B68-E79C-9A89-D6DF-E1E6A3E15194}"/>
+                  </a:ext>
+                </a:extLst>
+              </p:cNvPr>
+              <p:cNvSpPr txBox="1"/>
+              <p:nvPr/>
+            </p:nvSpPr>
+            <p:spPr>
+              <a:xfrm>
+                <a:off x="9461545" y="2314699"/>
+                <a:ext cx="519941" cy="184666"/>
+              </a:xfrm>
+              <a:prstGeom prst="rect">
+                <a:avLst/>
+              </a:prstGeom>
+              <a:solidFill>
+                <a:schemeClr val="bg1"/>
+              </a:solidFill>
+            </p:spPr>
+            <p:txBody>
+              <a:bodyPr wrap="none" lIns="36000" tIns="0" rIns="36000" bIns="0" rtlCol="0">
+                <a:spAutoFit/>
+              </a:bodyPr>
+              <a:lstStyle/>
+              <a:p>
+                <a:r>
+                  <a:rPr lang="de-DE" sz="1200" i="1" dirty="0" err="1">
+                    <a:solidFill>
+                      <a:schemeClr val="accent2"/>
+                    </a:solidFill>
+                  </a:rPr>
+                  <a:t>r</a:t>
+                </a:r>
+                <a:r>
+                  <a:rPr lang="de-DE" sz="1200" dirty="0">
+                    <a:solidFill>
+                      <a:schemeClr val="accent2"/>
+                    </a:solidFill>
+                  </a:rPr>
+                  <a:t> = .22</a:t>
+                </a:r>
+              </a:p>
+            </p:txBody>
+          </p:sp>
+        </p:grpSp>
         <p:cxnSp>
           <p:nvCxnSpPr>
-            <p:cNvPr id="5" name="Gerade Verbindung 4">
+            <p:cNvPr id="19" name="Gerade Verbindung 18">
               <a:extLst>
                 <a:ext uri="{FF2B5EF4-FFF2-40B4-BE49-F238E27FC236}">
-                  <a16:creationId xmlns:a16="http://schemas.microsoft.com/office/drawing/2014/main" id="{66EE5BFB-DAAD-5F1F-76CD-BA9676590728}"/>
+                  <a16:creationId xmlns:a16="http://schemas.microsoft.com/office/drawing/2014/main" id="{DDCA8A5F-2727-A372-ECC1-F3B3D7728A08}"/>
                 </a:ext>
               </a:extLst>
             </p:cNvPr>
@@ -11259,48 +12535,13 @@
             </a:fontRef>
           </p:style>
         </p:cxnSp>
-        <p:sp>
-          <p:nvSpPr>
-            <p:cNvPr id="13" name="Textfeld 12">
-              <a:extLst>
-                <a:ext uri="{FF2B5EF4-FFF2-40B4-BE49-F238E27FC236}">
-                  <a16:creationId xmlns:a16="http://schemas.microsoft.com/office/drawing/2014/main" id="{1B08C61B-EF56-923C-5D94-DF7B0AE3278E}"/>
-                </a:ext>
-              </a:extLst>
-            </p:cNvPr>
-            <p:cNvSpPr txBox="1"/>
-            <p:nvPr/>
-          </p:nvSpPr>
-          <p:spPr>
-            <a:xfrm>
-              <a:off x="10036806" y="1848091"/>
-              <a:ext cx="1418593" cy="307777"/>
-            </a:xfrm>
-            <a:prstGeom prst="rect">
-              <a:avLst/>
-            </a:prstGeom>
-            <a:noFill/>
-          </p:spPr>
-          <p:txBody>
-            <a:bodyPr wrap="none" rtlCol="0">
-              <a:spAutoFit/>
-            </a:bodyPr>
-            <a:lstStyle/>
-            <a:p>
-              <a:r>
-                <a:rPr lang="en-US" sz="1400" dirty="0"/>
-                <a:t>restricted by X</a:t>
-              </a:r>
-            </a:p>
-          </p:txBody>
-        </p:sp>
       </p:grpSp>
       <p:grpSp>
         <p:nvGrpSpPr>
-          <p:cNvPr id="25" name="Gruppieren 24">
+          <p:cNvPr id="28" name="Gruppieren 27">
             <a:extLst>
               <a:ext uri="{FF2B5EF4-FFF2-40B4-BE49-F238E27FC236}">
-                <a16:creationId xmlns:a16="http://schemas.microsoft.com/office/drawing/2014/main" id="{1AA869BB-CE9E-47FB-7B9A-5F4FEA6DA560}"/>
+                <a16:creationId xmlns:a16="http://schemas.microsoft.com/office/drawing/2014/main" id="{0021058D-C111-1487-ADDB-58EB1D7A4DFE}"/>
               </a:ext>
             </a:extLst>
           </p:cNvPr>
@@ -11315,45 +12556,194 @@
             <a:chExt cx="3059743" cy="1523999"/>
           </a:xfrm>
         </p:grpSpPr>
-        <p:pic>
-          <p:nvPicPr>
-            <p:cNvPr id="23" name="Grafik 22">
+        <p:grpSp>
+          <p:nvGrpSpPr>
+            <p:cNvPr id="25" name="Gruppieren 24">
               <a:extLst>
                 <a:ext uri="{FF2B5EF4-FFF2-40B4-BE49-F238E27FC236}">
-                  <a16:creationId xmlns:a16="http://schemas.microsoft.com/office/drawing/2014/main" id="{BF3D5555-9D8C-75F5-491A-A3BF957470CD}"/>
+                  <a16:creationId xmlns:a16="http://schemas.microsoft.com/office/drawing/2014/main" id="{1AA869BB-CE9E-47FB-7B9A-5F4FEA6DA560}"/>
                 </a:ext>
               </a:extLst>
             </p:cNvPr>
-            <p:cNvPicPr>
-              <a:picLocks noChangeAspect="1"/>
-            </p:cNvPicPr>
+            <p:cNvGrpSpPr/>
             <p:nvPr/>
-          </p:nvPicPr>
-          <p:blipFill>
-            <a:blip r:embed="rId4">
-              <a:alphaModFix/>
-            </a:blip>
-            <a:srcRect t="67334"/>
-            <a:stretch>
-              <a:fillRect/>
-            </a:stretch>
-          </p:blipFill>
+          </p:nvGrpSpPr>
+          <p:grpSpPr>
+            <a:xfrm>
+              <a:off x="8680606" y="4461164"/>
+              <a:ext cx="3059743" cy="1523999"/>
+              <a:chOff x="8680606" y="4461164"/>
+              <a:chExt cx="3059743" cy="1523999"/>
+            </a:xfrm>
+          </p:grpSpPr>
+          <p:pic>
+            <p:nvPicPr>
+              <p:cNvPr id="23" name="Grafik 22">
+                <a:extLst>
+                  <a:ext uri="{FF2B5EF4-FFF2-40B4-BE49-F238E27FC236}">
+                    <a16:creationId xmlns:a16="http://schemas.microsoft.com/office/drawing/2014/main" id="{BF3D5555-9D8C-75F5-491A-A3BF957470CD}"/>
+                  </a:ext>
+                </a:extLst>
+              </p:cNvPr>
+              <p:cNvPicPr>
+                <a:picLocks noChangeAspect="1"/>
+              </p:cNvPicPr>
+              <p:nvPr/>
+            </p:nvPicPr>
+            <p:blipFill>
+              <a:blip r:embed="rId5">
+                <a:alphaModFix/>
+              </a:blip>
+              <a:srcRect t="67334"/>
+              <a:stretch>
+                <a:fillRect/>
+              </a:stretch>
+            </p:blipFill>
+            <p:spPr>
+              <a:xfrm>
+                <a:off x="8680606" y="4461164"/>
+                <a:ext cx="1365092" cy="1523999"/>
+              </a:xfrm>
+              <a:prstGeom prst="rect">
+                <a:avLst/>
+              </a:prstGeom>
+            </p:spPr>
+          </p:pic>
+          <p:cxnSp>
+            <p:nvCxnSpPr>
+              <p:cNvPr id="9" name="Gerade Verbindung 8">
+                <a:extLst>
+                  <a:ext uri="{FF2B5EF4-FFF2-40B4-BE49-F238E27FC236}">
+                    <a16:creationId xmlns:a16="http://schemas.microsoft.com/office/drawing/2014/main" id="{D7B03046-2B91-AE79-437F-95492A2AC2E0}"/>
+                  </a:ext>
+                </a:extLst>
+              </p:cNvPr>
+              <p:cNvCxnSpPr>
+                <a:cxnSpLocks/>
+              </p:cNvCxnSpPr>
+              <p:nvPr/>
+            </p:nvCxnSpPr>
+            <p:spPr>
+              <a:xfrm rot="16200000">
+                <a:off x="9462653" y="4691640"/>
+                <a:ext cx="0" cy="1044000"/>
+              </a:xfrm>
+              <a:prstGeom prst="line">
+                <a:avLst/>
+              </a:prstGeom>
+              <a:ln w="12700">
+                <a:solidFill>
+                  <a:srgbClr val="C00000"/>
+                </a:solidFill>
+                <a:prstDash val="sysDash"/>
+              </a:ln>
+            </p:spPr>
+            <p:style>
+              <a:lnRef idx="1">
+                <a:schemeClr val="accent1"/>
+              </a:lnRef>
+              <a:fillRef idx="0">
+                <a:schemeClr val="accent1"/>
+              </a:fillRef>
+              <a:effectRef idx="0">
+                <a:schemeClr val="accent1"/>
+              </a:effectRef>
+              <a:fontRef idx="minor">
+                <a:schemeClr val="tx1"/>
+              </a:fontRef>
+            </p:style>
+          </p:cxnSp>
+          <p:sp>
+            <p:nvSpPr>
+              <p:cNvPr id="14" name="Textfeld 13">
+                <a:extLst>
+                  <a:ext uri="{FF2B5EF4-FFF2-40B4-BE49-F238E27FC236}">
+                    <a16:creationId xmlns:a16="http://schemas.microsoft.com/office/drawing/2014/main" id="{F080C65A-8D3F-8D8F-3CA4-CAC498920D1A}"/>
+                  </a:ext>
+                </a:extLst>
+              </p:cNvPr>
+              <p:cNvSpPr txBox="1"/>
+              <p:nvPr/>
+            </p:nvSpPr>
+            <p:spPr>
+              <a:xfrm>
+                <a:off x="10036806" y="5059751"/>
+                <a:ext cx="1703543" cy="307777"/>
+              </a:xfrm>
+              <a:prstGeom prst="rect">
+                <a:avLst/>
+              </a:prstGeom>
+              <a:noFill/>
+            </p:spPr>
+            <p:txBody>
+              <a:bodyPr wrap="none" rtlCol="0">
+                <a:spAutoFit/>
+              </a:bodyPr>
+              <a:lstStyle/>
+              <a:p>
+                <a:r>
+                  <a:rPr lang="en-US" sz="1400" dirty="0"/>
+                  <a:t>restricted by X &amp; Y</a:t>
+                </a:r>
+              </a:p>
+            </p:txBody>
+          </p:sp>
+        </p:grpSp>
+        <p:sp>
+          <p:nvSpPr>
+            <p:cNvPr id="17" name="Textfeld 16">
+              <a:extLst>
+                <a:ext uri="{FF2B5EF4-FFF2-40B4-BE49-F238E27FC236}">
+                  <a16:creationId xmlns:a16="http://schemas.microsoft.com/office/drawing/2014/main" id="{E091FE3A-7DBC-7AF1-97FF-96B155D6A46B}"/>
+                </a:ext>
+              </a:extLst>
+            </p:cNvPr>
+            <p:cNvSpPr txBox="1"/>
+            <p:nvPr/>
+          </p:nvSpPr>
           <p:spPr>
             <a:xfrm>
-              <a:off x="8680606" y="4461164"/>
-              <a:ext cx="1365092" cy="1523999"/>
+              <a:off x="9461967" y="5517389"/>
+              <a:ext cx="519941" cy="184666"/>
             </a:xfrm>
             <a:prstGeom prst="rect">
               <a:avLst/>
             </a:prstGeom>
+            <a:solidFill>
+              <a:schemeClr val="bg1"/>
+            </a:solidFill>
           </p:spPr>
-        </p:pic>
+          <p:txBody>
+            <a:bodyPr wrap="none" lIns="36000" tIns="0" rIns="36000" bIns="0" rtlCol="0">
+              <a:spAutoFit/>
+            </a:bodyPr>
+            <a:lstStyle/>
+            <a:p>
+              <a:r>
+                <a:rPr lang="de-DE" sz="1200" i="1" dirty="0" err="1">
+                  <a:solidFill>
+                    <a:schemeClr val="accent2"/>
+                  </a:solidFill>
+                </a:rPr>
+                <a:t>r</a:t>
+              </a:r>
+              <a:r>
+                <a:rPr lang="de-DE" sz="1200" dirty="0">
+                  <a:solidFill>
+                    <a:schemeClr val="accent2"/>
+                  </a:solidFill>
+                </a:rPr>
+                <a:t> = .18</a:t>
+              </a:r>
+            </a:p>
+          </p:txBody>
+        </p:sp>
         <p:cxnSp>
           <p:nvCxnSpPr>
-            <p:cNvPr id="6" name="Gerade Verbindung 5">
+            <p:cNvPr id="27" name="Gerade Verbindung 26">
               <a:extLst>
                 <a:ext uri="{FF2B5EF4-FFF2-40B4-BE49-F238E27FC236}">
-                  <a16:creationId xmlns:a16="http://schemas.microsoft.com/office/drawing/2014/main" id="{DBE3EC40-E732-9566-C3E8-B9FB30DD4481}"/>
+                  <a16:creationId xmlns:a16="http://schemas.microsoft.com/office/drawing/2014/main" id="{D89EA9D5-B81D-65B6-12A4-3911DB2EB3CF}"/>
                 </a:ext>
               </a:extLst>
             </p:cNvPr>
@@ -11362,7 +12752,7 @@
           </p:nvCxnSpPr>
           <p:spPr>
             <a:xfrm>
-              <a:off x="9462653" y="4691640"/>
+              <a:off x="9459632" y="4699523"/>
               <a:ext cx="0" cy="1044000"/>
             </a:xfrm>
             <a:prstGeom prst="line">
@@ -11390,155 +12780,109 @@
             </a:fontRef>
           </p:style>
         </p:cxnSp>
-        <p:cxnSp>
-          <p:nvCxnSpPr>
-            <p:cNvPr id="9" name="Gerade Verbindung 8">
-              <a:extLst>
-                <a:ext uri="{FF2B5EF4-FFF2-40B4-BE49-F238E27FC236}">
-                  <a16:creationId xmlns:a16="http://schemas.microsoft.com/office/drawing/2014/main" id="{D7B03046-2B91-AE79-437F-95492A2AC2E0}"/>
-                </a:ext>
-              </a:extLst>
-            </p:cNvPr>
-            <p:cNvCxnSpPr>
-              <a:cxnSpLocks/>
-            </p:cNvCxnSpPr>
-            <p:nvPr/>
-          </p:nvCxnSpPr>
-          <p:spPr>
-            <a:xfrm rot="16200000">
-              <a:off x="9462653" y="4691640"/>
-              <a:ext cx="0" cy="1044000"/>
-            </a:xfrm>
-            <a:prstGeom prst="line">
-              <a:avLst/>
-            </a:prstGeom>
-            <a:ln w="12700">
-              <a:solidFill>
-                <a:srgbClr val="C00000"/>
-              </a:solidFill>
-              <a:prstDash val="sysDash"/>
-            </a:ln>
-          </p:spPr>
-          <p:style>
-            <a:lnRef idx="1">
-              <a:schemeClr val="accent1"/>
-            </a:lnRef>
-            <a:fillRef idx="0">
-              <a:schemeClr val="accent1"/>
-            </a:fillRef>
-            <a:effectRef idx="0">
-              <a:schemeClr val="accent1"/>
-            </a:effectRef>
-            <a:fontRef idx="minor">
-              <a:schemeClr val="tx1"/>
-            </a:fontRef>
-          </p:style>
-        </p:cxnSp>
-        <p:sp>
-          <p:nvSpPr>
-            <p:cNvPr id="14" name="Textfeld 13">
-              <a:extLst>
-                <a:ext uri="{FF2B5EF4-FFF2-40B4-BE49-F238E27FC236}">
-                  <a16:creationId xmlns:a16="http://schemas.microsoft.com/office/drawing/2014/main" id="{F080C65A-8D3F-8D8F-3CA4-CAC498920D1A}"/>
-                </a:ext>
-              </a:extLst>
-            </p:cNvPr>
-            <p:cNvSpPr txBox="1"/>
-            <p:nvPr/>
-          </p:nvSpPr>
-          <p:spPr>
-            <a:xfrm>
-              <a:off x="10036806" y="5059751"/>
-              <a:ext cx="1703543" cy="307777"/>
-            </a:xfrm>
-            <a:prstGeom prst="rect">
-              <a:avLst/>
-            </a:prstGeom>
-            <a:noFill/>
-          </p:spPr>
-          <p:txBody>
-            <a:bodyPr wrap="none" rtlCol="0">
-              <a:spAutoFit/>
-            </a:bodyPr>
-            <a:lstStyle/>
-            <a:p>
-              <a:r>
-                <a:rPr lang="en-US" sz="1400" dirty="0"/>
-                <a:t>restricted by X &amp; Y</a:t>
-              </a:r>
-            </a:p>
-          </p:txBody>
-        </p:sp>
       </p:grpSp>
-      <p:pic>
-        <p:nvPicPr>
-          <p:cNvPr id="21" name="Grafik 20">
+      <p:sp>
+        <p:nvSpPr>
+          <p:cNvPr id="30" name="Textfeld 29">
             <a:extLst>
               <a:ext uri="{FF2B5EF4-FFF2-40B4-BE49-F238E27FC236}">
-                <a16:creationId xmlns:a16="http://schemas.microsoft.com/office/drawing/2014/main" id="{7AFED15D-3916-F5B0-FFA8-26D4BBD723C5}"/>
+                <a16:creationId xmlns:a16="http://schemas.microsoft.com/office/drawing/2014/main" id="{9597FEF9-D946-2AA1-9A16-48388EE58952}"/>
               </a:ext>
             </a:extLst>
           </p:cNvPr>
-          <p:cNvPicPr>
-            <a:picLocks noChangeAspect="1"/>
-          </p:cNvPicPr>
+          <p:cNvSpPr txBox="1"/>
           <p:nvPr/>
-        </p:nvPicPr>
-        <p:blipFill>
-          <a:blip r:embed="rId5">
-            <a:duotone>
-              <a:schemeClr val="accent2">
-                <a:shade val="45000"/>
-                <a:satMod val="135000"/>
-              </a:schemeClr>
-              <a:prstClr val="white"/>
-            </a:duotone>
-          </a:blip>
-          <a:stretch>
-            <a:fillRect/>
-          </a:stretch>
-        </p:blipFill>
+        </p:nvSpPr>
         <p:spPr>
           <a:xfrm>
-            <a:off x="2826074" y="5488584"/>
-            <a:ext cx="2227828" cy="450105"/>
+            <a:off x="7437120" y="1172235"/>
+            <a:ext cx="1180452" cy="307777"/>
           </a:xfrm>
           <a:prstGeom prst="rect">
             <a:avLst/>
           </a:prstGeom>
+          <a:solidFill>
+            <a:schemeClr val="bg1"/>
+          </a:solidFill>
         </p:spPr>
-      </p:pic>
-      <p:pic>
-        <p:nvPicPr>
-          <p:cNvPr id="26" name="Grafik 25">
+        <p:txBody>
+          <a:bodyPr wrap="none" rtlCol="0">
+            <a:spAutoFit/>
+          </a:bodyPr>
+          <a:lstStyle/>
+          <a:p>
+            <a:pPr algn="ctr"/>
+            <a:r>
+              <a:rPr lang="de-DE" sz="1400" b="1" dirty="0">
+                <a:latin typeface="Open Sans SemiBold" panose="020B0606030504020204" pitchFamily="34" charset="0"/>
+                <a:ea typeface="Open Sans SemiBold" panose="020B0606030504020204" pitchFamily="34" charset="0"/>
+                <a:cs typeface="Open Sans SemiBold" panose="020B0606030504020204" pitchFamily="34" charset="0"/>
+              </a:rPr>
+              <a:t>True Scores</a:t>
+            </a:r>
+            <a:endParaRPr lang="de-DE" b="1" dirty="0">
+              <a:latin typeface="Open Sans SemiBold" panose="020B0606030504020204" pitchFamily="34" charset="0"/>
+              <a:ea typeface="Open Sans SemiBold" panose="020B0606030504020204" pitchFamily="34" charset="0"/>
+              <a:cs typeface="Open Sans SemiBold" panose="020B0606030504020204" pitchFamily="34" charset="0"/>
+            </a:endParaRPr>
+          </a:p>
+        </p:txBody>
+      </p:sp>
+      <p:sp>
+        <p:nvSpPr>
+          <p:cNvPr id="31" name="Textfeld 30">
             <a:extLst>
               <a:ext uri="{FF2B5EF4-FFF2-40B4-BE49-F238E27FC236}">
-                <a16:creationId xmlns:a16="http://schemas.microsoft.com/office/drawing/2014/main" id="{EF5A5CA1-8DAB-6572-DD2A-3D909CEB6F83}"/>
+                <a16:creationId xmlns:a16="http://schemas.microsoft.com/office/drawing/2014/main" id="{F2EC7AB9-A2BB-3514-9643-4E6F3B8B9F74}"/>
               </a:ext>
             </a:extLst>
           </p:cNvPr>
-          <p:cNvPicPr>
-            <a:picLocks noChangeAspect="1"/>
-          </p:cNvPicPr>
+          <p:cNvSpPr txBox="1"/>
           <p:nvPr/>
-        </p:nvPicPr>
-        <p:blipFill>
-          <a:blip r:embed="rId6"/>
-          <a:srcRect t="32526" r="66947" b="32714"/>
-          <a:stretch>
-            <a:fillRect/>
-          </a:stretch>
-        </p:blipFill>
+        </p:nvSpPr>
         <p:spPr>
           <a:xfrm>
-            <a:off x="7224555" y="2841917"/>
-            <a:ext cx="1403898" cy="1619247"/>
+            <a:off x="9012519" y="1172235"/>
+            <a:ext cx="904415" cy="307777"/>
           </a:xfrm>
           <a:prstGeom prst="rect">
             <a:avLst/>
           </a:prstGeom>
+          <a:solidFill>
+            <a:schemeClr val="bg1"/>
+          </a:solidFill>
         </p:spPr>
-      </p:pic>
+        <p:txBody>
+          <a:bodyPr wrap="none" rtlCol="0">
+            <a:spAutoFit/>
+          </a:bodyPr>
+          <a:lstStyle/>
+          <a:p>
+            <a:pPr algn="ctr"/>
+            <a:r>
+              <a:rPr lang="de-DE" sz="1400" b="1" i="1" dirty="0">
+                <a:latin typeface="Open Sans SemiBold" panose="020B0606030504020204" pitchFamily="34" charset="0"/>
+                <a:ea typeface="Open Sans SemiBold" panose="020B0606030504020204" pitchFamily="34" charset="0"/>
+                <a:cs typeface="Open Sans SemiBold" panose="020B0606030504020204" pitchFamily="34" charset="0"/>
+              </a:rPr>
+              <a:t>Rel</a:t>
+            </a:r>
+            <a:r>
+              <a:rPr lang="de-DE" sz="1400" b="1" dirty="0">
+                <a:latin typeface="Open Sans SemiBold" panose="020B0606030504020204" pitchFamily="34" charset="0"/>
+                <a:ea typeface="Open Sans SemiBold" panose="020B0606030504020204" pitchFamily="34" charset="0"/>
+                <a:cs typeface="Open Sans SemiBold" panose="020B0606030504020204" pitchFamily="34" charset="0"/>
+              </a:rPr>
+              <a:t> = .80</a:t>
+            </a:r>
+            <a:endParaRPr lang="de-DE" b="1" dirty="0">
+              <a:latin typeface="Open Sans SemiBold" panose="020B0606030504020204" pitchFamily="34" charset="0"/>
+              <a:ea typeface="Open Sans SemiBold" panose="020B0606030504020204" pitchFamily="34" charset="0"/>
+              <a:cs typeface="Open Sans SemiBold" panose="020B0606030504020204" pitchFamily="34" charset="0"/>
+            </a:endParaRPr>
+          </a:p>
+        </p:txBody>
+      </p:sp>
     </p:spTree>
     <p:custDataLst>
       <p:tags r:id="rId1"/>
@@ -11552,13 +12896,13 @@
   <p:clrMapOvr>
     <a:masterClrMapping/>
   </p:clrMapOvr>
-  <mc:AlternateContent xmlns:mc="http://schemas.openxmlformats.org/markup-compatibility/2006">
-    <mc:Choice xmlns:p14="http://schemas.microsoft.com/office/powerpoint/2010/main" Requires="p14">
+  <mc:AlternateContent xmlns:mc="http://schemas.openxmlformats.org/markup-compatibility/2006" xmlns:p14="http://schemas.microsoft.com/office/powerpoint/2010/main">
+    <mc:Choice Requires="p14">
       <p:transition spd="med" p14:dur="700">
         <p:fade/>
       </p:transition>
     </mc:Choice>
-    <mc:Fallback>
+    <mc:Fallback xmlns="">
       <p:transition spd="med">
         <p:fade/>
       </p:transition>
@@ -11641,7 +12985,7 @@
                                           </p:stCondLst>
                                         </p:cTn>
                                         <p:tgtEl>
-                                          <p:spTgt spid="24"/>
+                                          <p:spTgt spid="20"/>
                                         </p:tgtEl>
                                         <p:attrNameLst>
                                           <p:attrName>style.visibility</p:attrName>
@@ -11655,7 +12999,7 @@
                                       <p:cBhvr>
                                         <p:cTn id="10" dur="500"/>
                                         <p:tgtEl>
-                                          <p:spTgt spid="24"/>
+                                          <p:spTgt spid="20"/>
                                         </p:tgtEl>
                                       </p:cBhvr>
                                     </p:animEffect>
@@ -11676,7 +13020,7 @@
                                           </p:stCondLst>
                                         </p:cTn>
                                         <p:tgtEl>
-                                          <p:spTgt spid="25"/>
+                                          <p:spTgt spid="28"/>
                                         </p:tgtEl>
                                         <p:attrNameLst>
                                           <p:attrName>style.visibility</p:attrName>
@@ -11690,7 +13034,7 @@
                                       <p:cBhvr>
                                         <p:cTn id="13" dur="500"/>
                                         <p:tgtEl>
-                                          <p:spTgt spid="25"/>
+                                          <p:spTgt spid="28"/>
                                         </p:tgtEl>
                                       </p:cBhvr>
                                     </p:animEffect>
@@ -14559,13 +15903,13 @@
   <p:clrMapOvr>
     <a:masterClrMapping/>
   </p:clrMapOvr>
-  <mc:AlternateContent xmlns:mc="http://schemas.openxmlformats.org/markup-compatibility/2006">
-    <mc:Choice xmlns:p14="http://schemas.microsoft.com/office/powerpoint/2010/main" Requires="p14">
+  <mc:AlternateContent xmlns:mc="http://schemas.openxmlformats.org/markup-compatibility/2006" xmlns:p14="http://schemas.microsoft.com/office/powerpoint/2010/main">
+    <mc:Choice Requires="p14">
       <p:transition spd="med" p14:dur="700">
         <p:fade/>
       </p:transition>
     </mc:Choice>
-    <mc:Fallback>
+    <mc:Fallback xmlns="">
       <p:transition spd="med">
         <p:fade/>
       </p:transition>
@@ -16314,13 +17658,13 @@
   <p:clrMapOvr>
     <a:masterClrMapping/>
   </p:clrMapOvr>
-  <mc:AlternateContent xmlns:mc="http://schemas.openxmlformats.org/markup-compatibility/2006">
-    <mc:Choice xmlns:p14="http://schemas.microsoft.com/office/powerpoint/2010/main" Requires="p14">
+  <mc:AlternateContent xmlns:mc="http://schemas.openxmlformats.org/markup-compatibility/2006" xmlns:p14="http://schemas.microsoft.com/office/powerpoint/2010/main">
+    <mc:Choice Requires="p14">
       <p:transition spd="med" p14:dur="700">
         <p:fade/>
       </p:transition>
     </mc:Choice>
-    <mc:Fallback>
+    <mc:Fallback xmlns="">
       <p:transition spd="med">
         <p:fade/>
       </p:transition>
@@ -20010,13 +21354,13 @@
   <p:clrMapOvr>
     <a:masterClrMapping/>
   </p:clrMapOvr>
-  <mc:AlternateContent xmlns:mc="http://schemas.openxmlformats.org/markup-compatibility/2006">
-    <mc:Choice xmlns:p14="http://schemas.microsoft.com/office/powerpoint/2010/main" Requires="p14">
+  <mc:AlternateContent xmlns:mc="http://schemas.openxmlformats.org/markup-compatibility/2006" xmlns:p14="http://schemas.microsoft.com/office/powerpoint/2010/main">
+    <mc:Choice Requires="p14">
       <p:transition spd="med" p14:dur="700">
         <p:fade/>
       </p:transition>
     </mc:Choice>
-    <mc:Fallback>
+    <mc:Fallback xmlns="">
       <p:transition spd="med">
         <p:fade/>
       </p:transition>
@@ -20686,8 +22030,8 @@
         </p:nvSpPr>
         <p:spPr>
           <a:xfrm>
-            <a:off x="8454256" y="2082079"/>
-            <a:ext cx="290712" cy="276999"/>
+            <a:off x="8436623" y="2070928"/>
+            <a:ext cx="325978" cy="307777"/>
           </a:xfrm>
           <a:prstGeom prst="rect">
             <a:avLst/>
@@ -20702,15 +22046,16 @@
           </a:bodyPr>
           <a:lstStyle/>
           <a:p>
-            <a:r>
-              <a:rPr lang="en-US" sz="1200" noProof="1">
+            <a:pPr algn="ctr"/>
+            <a:r>
+              <a:rPr lang="en-US" sz="1400" noProof="1">
                 <a:solidFill>
                   <a:schemeClr val="accent2"/>
                 </a:solidFill>
               </a:rPr>
               <a:t>.03</a:t>
             </a:r>
-            <a:endParaRPr lang="en-US" noProof="1">
+            <a:endParaRPr lang="en-US" sz="1800" noProof="1">
               <a:solidFill>
                 <a:schemeClr val="accent2"/>
               </a:solidFill>
@@ -20732,8 +22077,8 @@
         </p:nvSpPr>
         <p:spPr>
           <a:xfrm>
-            <a:off x="9937865" y="2080105"/>
-            <a:ext cx="425364" cy="276999"/>
+            <a:off x="9909011" y="2068954"/>
+            <a:ext cx="483073" cy="307777"/>
           </a:xfrm>
           <a:prstGeom prst="rect">
             <a:avLst/>
@@ -20748,15 +22093,16 @@
           </a:bodyPr>
           <a:lstStyle/>
           <a:p>
-            <a:r>
-              <a:rPr lang="en-US" sz="1200" noProof="1">
+            <a:pPr algn="ctr"/>
+            <a:r>
+              <a:rPr lang="en-US" sz="1400" noProof="1">
                 <a:solidFill>
                   <a:schemeClr val="accent2"/>
                 </a:solidFill>
               </a:rPr>
               <a:t>-.17*</a:t>
             </a:r>
-            <a:endParaRPr lang="en-US" noProof="1">
+            <a:endParaRPr lang="en-US" sz="1800" noProof="1">
               <a:solidFill>
                 <a:schemeClr val="accent2"/>
               </a:solidFill>
@@ -20778,8 +22124,8 @@
         </p:nvSpPr>
         <p:spPr>
           <a:xfrm>
-            <a:off x="9173835" y="1456991"/>
-            <a:ext cx="340405" cy="276999"/>
+            <a:off x="9152195" y="1445840"/>
+            <a:ext cx="383686" cy="307777"/>
           </a:xfrm>
           <a:prstGeom prst="rect">
             <a:avLst/>
@@ -20794,17 +22140,18 @@
           </a:bodyPr>
           <a:lstStyle/>
           <a:p>
-            <a:r>
-              <a:rPr lang="en-US" sz="1200" noProof="1">
-                <a:solidFill>
-                  <a:schemeClr val="accent2"/>
+            <a:pPr algn="ctr"/>
+            <a:r>
+              <a:rPr lang="en-US" sz="1400" noProof="1">
+                <a:solidFill>
+                  <a:srgbClr val="C00000"/>
                 </a:solidFill>
               </a:rPr>
               <a:t>-.06</a:t>
             </a:r>
-            <a:endParaRPr lang="en-US" noProof="1">
+            <a:endParaRPr lang="en-US" sz="1800" noProof="1">
               <a:solidFill>
-                <a:schemeClr val="accent2"/>
+                <a:srgbClr val="C00000"/>
               </a:solidFill>
             </a:endParaRPr>
           </a:p>
@@ -20940,13 +22287,13 @@
   <p:clrMapOvr>
     <a:masterClrMapping/>
   </p:clrMapOvr>
-  <mc:AlternateContent xmlns:mc="http://schemas.openxmlformats.org/markup-compatibility/2006">
-    <mc:Choice xmlns:p14="http://schemas.microsoft.com/office/powerpoint/2010/main" Requires="p14">
+  <mc:AlternateContent xmlns:mc="http://schemas.openxmlformats.org/markup-compatibility/2006" xmlns:p14="http://schemas.microsoft.com/office/powerpoint/2010/main">
+    <mc:Choice Requires="p14">
       <p:transition spd="med" p14:dur="700">
         <p:fade/>
       </p:transition>
     </mc:Choice>
-    <mc:Fallback>
+    <mc:Fallback xmlns="">
       <p:transition spd="med">
         <p:fade/>
       </p:transition>
